--- a/Documentation/Slides/Week_32.pptx
+++ b/Documentation/Slides/Week_32.pptx
@@ -5,47 +5,53 @@
     <p:sldMasterId id="2147483648" r:id="rId4"/>
   </p:sldMasterIdLst>
   <p:notesMasterIdLst>
-    <p:notesMasterId r:id="rId14"/>
+    <p:notesMasterId r:id="rId20"/>
   </p:notesMasterIdLst>
   <p:sldIdLst>
     <p:sldId id="267" r:id="rId5"/>
     <p:sldId id="279" r:id="rId6"/>
     <p:sldId id="287" r:id="rId7"/>
-    <p:sldId id="289" r:id="rId8"/>
-    <p:sldId id="290" r:id="rId9"/>
-    <p:sldId id="291" r:id="rId10"/>
-    <p:sldId id="288" r:id="rId11"/>
-    <p:sldId id="286" r:id="rId12"/>
-    <p:sldId id="277" r:id="rId13"/>
+    <p:sldId id="288" r:id="rId8"/>
+    <p:sldId id="289" r:id="rId9"/>
+    <p:sldId id="290" r:id="rId10"/>
+    <p:sldId id="291" r:id="rId11"/>
+    <p:sldId id="292" r:id="rId12"/>
+    <p:sldId id="293" r:id="rId13"/>
+    <p:sldId id="294" r:id="rId14"/>
+    <p:sldId id="295" r:id="rId15"/>
+    <p:sldId id="296" r:id="rId16"/>
+    <p:sldId id="297" r:id="rId17"/>
+    <p:sldId id="286" r:id="rId18"/>
+    <p:sldId id="277" r:id="rId19"/>
   </p:sldIdLst>
   <p:sldSz cx="9144000" cy="6858000" type="screen4x3"/>
   <p:notesSz cx="6858000" cy="9144000"/>
   <p:embeddedFontLst>
     <p:embeddedFont>
       <p:font typeface="Acumin Pro Condensed Semibold" panose="020B0706020202020204" pitchFamily="34" charset="77"/>
-      <p:regular r:id="rId15"/>
-      <p:bold r:id="rId16"/>
-      <p:italic r:id="rId17"/>
-      <p:boldItalic r:id="rId18"/>
+      <p:regular r:id="rId21"/>
+      <p:bold r:id="rId22"/>
+      <p:italic r:id="rId23"/>
+      <p:boldItalic r:id="rId24"/>
     </p:embeddedFont>
     <p:embeddedFont>
       <p:font typeface="Acumin Pro Medium" panose="020B0604020202020204" pitchFamily="34" charset="77"/>
-      <p:regular r:id="rId19"/>
-      <p:italic r:id="rId20"/>
+      <p:regular r:id="rId25"/>
+      <p:italic r:id="rId26"/>
     </p:embeddedFont>
     <p:embeddedFont>
       <p:font typeface="Franklin Gothic Book" panose="020B0503020102020204" pitchFamily="34" charset="0"/>
-      <p:regular r:id="rId21"/>
-      <p:italic r:id="rId22"/>
+      <p:regular r:id="rId27"/>
+      <p:italic r:id="rId28"/>
     </p:embeddedFont>
     <p:embeddedFont>
       <p:font typeface="Franklin Gothic Medium" panose="020B0603020102020204" pitchFamily="34" charset="0"/>
-      <p:regular r:id="rId23"/>
-      <p:italic r:id="rId24"/>
+      <p:regular r:id="rId29"/>
+      <p:italic r:id="rId30"/>
     </p:embeddedFont>
     <p:embeddedFont>
       <p:font typeface="Franklin Gothic Medium Cond" panose="020B0606030402020204" pitchFamily="34" charset="0"/>
-      <p:regular r:id="rId25"/>
+      <p:regular r:id="rId31"/>
     </p:embeddedFont>
   </p:embeddedFontLst>
   <p:defaultTextStyle>
@@ -250,7 +256,7 @@
           <a:p>
             <a:fld id="{01926CF7-48D8-2F46-AFC8-8A5D2298DFDD}" type="datetimeFigureOut">
               <a:rPr lang="en-US" smtClean="0"/>
-              <a:t>5/21/26</a:t>
+              <a:t>5/25/26</a:t>
             </a:fld>
             <a:endParaRPr lang="en-US"/>
           </a:p>
@@ -695,6 +701,198 @@
     <p:extLst>
       <p:ext uri="{BB962C8B-B14F-4D97-AF65-F5344CB8AC3E}">
         <p14:creationId xmlns:p14="http://schemas.microsoft.com/office/powerpoint/2010/main" val="1580631068"/>
+      </p:ext>
+    </p:extLst>
+  </p:cSld>
+  <p:clrMapOvr>
+    <a:masterClrMapping/>
+  </p:clrMapOvr>
+</p:notes>
+</file>
+
+<file path=ppt/notesSlides/notesSlide3.xml><?xml version="1.0" encoding="utf-8"?>
+<p:notes xmlns:a="http://schemas.openxmlformats.org/drawingml/2006/main" xmlns:r="http://schemas.openxmlformats.org/officeDocument/2006/relationships" xmlns:p="http://schemas.openxmlformats.org/presentationml/2006/main">
+  <p:cSld>
+    <p:spTree>
+      <p:nvGrpSpPr>
+        <p:cNvPr id="1" name=""/>
+        <p:cNvGrpSpPr/>
+        <p:nvPr/>
+      </p:nvGrpSpPr>
+      <p:grpSpPr>
+        <a:xfrm>
+          <a:off x="0" y="0"/>
+          <a:ext cx="0" cy="0"/>
+          <a:chOff x="0" y="0"/>
+          <a:chExt cx="0" cy="0"/>
+        </a:xfrm>
+      </p:grpSpPr>
+      <p:sp>
+        <p:nvSpPr>
+          <p:cNvPr id="2" name="Slide Image Placeholder 1"/>
+          <p:cNvSpPr>
+            <a:spLocks noGrp="1" noRot="1" noChangeAspect="1"/>
+          </p:cNvSpPr>
+          <p:nvPr>
+            <p:ph type="sldImg"/>
+          </p:nvPr>
+        </p:nvSpPr>
+        <p:spPr/>
+      </p:sp>
+      <p:sp>
+        <p:nvSpPr>
+          <p:cNvPr id="3" name="Notes Placeholder 2"/>
+          <p:cNvSpPr>
+            <a:spLocks noGrp="1"/>
+          </p:cNvSpPr>
+          <p:nvPr>
+            <p:ph type="body" idx="1"/>
+          </p:nvPr>
+        </p:nvSpPr>
+        <p:spPr/>
+        <p:txBody>
+          <a:bodyPr/>
+          <a:lstStyle/>
+          <a:p>
+            <a:endParaRPr lang="en-US" dirty="0"/>
+          </a:p>
+        </p:txBody>
+      </p:sp>
+      <p:sp>
+        <p:nvSpPr>
+          <p:cNvPr id="4" name="Slide Number Placeholder 3"/>
+          <p:cNvSpPr>
+            <a:spLocks noGrp="1"/>
+          </p:cNvSpPr>
+          <p:nvPr>
+            <p:ph type="sldNum" sz="quarter" idx="5"/>
+          </p:nvPr>
+        </p:nvSpPr>
+        <p:spPr/>
+        <p:txBody>
+          <a:bodyPr/>
+          <a:lstStyle/>
+          <a:p>
+            <a:fld id="{237BF745-0557-B241-863F-056113C7032A}" type="slidenum">
+              <a:rPr lang="en-US" smtClean="0"/>
+              <a:t>8</a:t>
+            </a:fld>
+            <a:endParaRPr lang="en-US"/>
+          </a:p>
+        </p:txBody>
+      </p:sp>
+    </p:spTree>
+    <p:extLst>
+      <p:ext uri="{BB962C8B-B14F-4D97-AF65-F5344CB8AC3E}">
+        <p14:creationId xmlns:p14="http://schemas.microsoft.com/office/powerpoint/2010/main" val="3264391739"/>
+      </p:ext>
+    </p:extLst>
+  </p:cSld>
+  <p:clrMapOvr>
+    <a:masterClrMapping/>
+  </p:clrMapOvr>
+</p:notes>
+</file>
+
+<file path=ppt/notesSlides/notesSlide4.xml><?xml version="1.0" encoding="utf-8"?>
+<p:notes xmlns:a="http://schemas.openxmlformats.org/drawingml/2006/main" xmlns:r="http://schemas.openxmlformats.org/officeDocument/2006/relationships" xmlns:p="http://schemas.openxmlformats.org/presentationml/2006/main">
+  <p:cSld>
+    <p:spTree>
+      <p:nvGrpSpPr>
+        <p:cNvPr id="1" name="">
+          <a:extLst>
+            <a:ext uri="{FF2B5EF4-FFF2-40B4-BE49-F238E27FC236}">
+              <a16:creationId xmlns:a16="http://schemas.microsoft.com/office/drawing/2014/main" id="{43A5D771-FC02-9C85-1BFA-78E0D114CC46}"/>
+            </a:ext>
+          </a:extLst>
+        </p:cNvPr>
+        <p:cNvGrpSpPr/>
+        <p:nvPr/>
+      </p:nvGrpSpPr>
+      <p:grpSpPr>
+        <a:xfrm>
+          <a:off x="0" y="0"/>
+          <a:ext cx="0" cy="0"/>
+          <a:chOff x="0" y="0"/>
+          <a:chExt cx="0" cy="0"/>
+        </a:xfrm>
+      </p:grpSpPr>
+      <p:sp>
+        <p:nvSpPr>
+          <p:cNvPr id="2" name="Slide Image Placeholder 1">
+            <a:extLst>
+              <a:ext uri="{FF2B5EF4-FFF2-40B4-BE49-F238E27FC236}">
+                <a16:creationId xmlns:a16="http://schemas.microsoft.com/office/drawing/2014/main" id="{C0D7E873-3DC5-DE31-9D4D-2DB1FD426C40}"/>
+              </a:ext>
+            </a:extLst>
+          </p:cNvPr>
+          <p:cNvSpPr>
+            <a:spLocks noGrp="1" noRot="1" noChangeAspect="1"/>
+          </p:cNvSpPr>
+          <p:nvPr>
+            <p:ph type="sldImg"/>
+          </p:nvPr>
+        </p:nvSpPr>
+        <p:spPr/>
+      </p:sp>
+      <p:sp>
+        <p:nvSpPr>
+          <p:cNvPr id="3" name="Notes Placeholder 2">
+            <a:extLst>
+              <a:ext uri="{FF2B5EF4-FFF2-40B4-BE49-F238E27FC236}">
+                <a16:creationId xmlns:a16="http://schemas.microsoft.com/office/drawing/2014/main" id="{5F693CCF-ACA1-42BF-830A-98C317A861D7}"/>
+              </a:ext>
+            </a:extLst>
+          </p:cNvPr>
+          <p:cNvSpPr>
+            <a:spLocks noGrp="1"/>
+          </p:cNvSpPr>
+          <p:nvPr>
+            <p:ph type="body" idx="1"/>
+          </p:nvPr>
+        </p:nvSpPr>
+        <p:spPr/>
+        <p:txBody>
+          <a:bodyPr/>
+          <a:lstStyle/>
+          <a:p>
+            <a:endParaRPr lang="en-US" dirty="0"/>
+          </a:p>
+        </p:txBody>
+      </p:sp>
+      <p:sp>
+        <p:nvSpPr>
+          <p:cNvPr id="4" name="Slide Number Placeholder 3">
+            <a:extLst>
+              <a:ext uri="{FF2B5EF4-FFF2-40B4-BE49-F238E27FC236}">
+                <a16:creationId xmlns:a16="http://schemas.microsoft.com/office/drawing/2014/main" id="{89CF8F59-2F0D-2C02-9DF9-95A7B2A01FAB}"/>
+              </a:ext>
+            </a:extLst>
+          </p:cNvPr>
+          <p:cNvSpPr>
+            <a:spLocks noGrp="1"/>
+          </p:cNvSpPr>
+          <p:nvPr>
+            <p:ph type="sldNum" sz="quarter" idx="5"/>
+          </p:nvPr>
+        </p:nvSpPr>
+        <p:spPr/>
+        <p:txBody>
+          <a:bodyPr/>
+          <a:lstStyle/>
+          <a:p>
+            <a:fld id="{237BF745-0557-B241-863F-056113C7032A}" type="slidenum">
+              <a:rPr lang="en-US" smtClean="0"/>
+              <a:t>9</a:t>
+            </a:fld>
+            <a:endParaRPr lang="en-US"/>
+          </a:p>
+        </p:txBody>
+      </p:sp>
+    </p:spTree>
+    <p:extLst>
+      <p:ext uri="{BB962C8B-B14F-4D97-AF65-F5344CB8AC3E}">
+        <p14:creationId xmlns:p14="http://schemas.microsoft.com/office/powerpoint/2010/main" val="1377589433"/>
       </p:ext>
     </p:extLst>
   </p:cSld>
@@ -13608,7 +13806,7 @@
               <a:rPr lang="en-US" b="1" dirty="0">
                 <a:latin typeface="Acumin Pro Condensed Semibold" panose="020B0506020202020204" pitchFamily="34" charset="77"/>
               </a:rPr>
-              <a:t>Week 1</a:t>
+              <a:t>Week 2</a:t>
             </a:r>
           </a:p>
         </p:txBody>
@@ -13668,7 +13866,7 @@
           <a:p>
             <a:r>
               <a:rPr lang="en-US" dirty="0"/>
-              <a:t>05/18/26</a:t>
+              <a:t>05/25/26</a:t>
             </a:r>
           </a:p>
         </p:txBody>
@@ -13677,6 +13875,1608 @@
     <p:extLst>
       <p:ext uri="{BB962C8B-B14F-4D97-AF65-F5344CB8AC3E}">
         <p14:creationId xmlns:p14="http://schemas.microsoft.com/office/powerpoint/2010/main" val="4154997097"/>
+      </p:ext>
+    </p:extLst>
+  </p:cSld>
+  <p:clrMapOvr>
+    <a:masterClrMapping/>
+  </p:clrMapOvr>
+</p:sld>
+</file>
+
+<file path=ppt/slides/slide10.xml><?xml version="1.0" encoding="utf-8"?>
+<p:sld xmlns:a="http://schemas.openxmlformats.org/drawingml/2006/main" xmlns:r="http://schemas.openxmlformats.org/officeDocument/2006/relationships" xmlns:p="http://schemas.openxmlformats.org/presentationml/2006/main">
+  <p:cSld>
+    <p:spTree>
+      <p:nvGrpSpPr>
+        <p:cNvPr id="1" name=""/>
+        <p:cNvGrpSpPr/>
+        <p:nvPr/>
+      </p:nvGrpSpPr>
+      <p:grpSpPr>
+        <a:xfrm>
+          <a:off x="0" y="0"/>
+          <a:ext cx="0" cy="0"/>
+          <a:chOff x="0" y="0"/>
+          <a:chExt cx="0" cy="0"/>
+        </a:xfrm>
+      </p:grpSpPr>
+      <p:sp>
+        <p:nvSpPr>
+          <p:cNvPr id="2" name="Text Placeholder 1">
+            <a:extLst>
+              <a:ext uri="{FF2B5EF4-FFF2-40B4-BE49-F238E27FC236}">
+                <a16:creationId xmlns:a16="http://schemas.microsoft.com/office/drawing/2014/main" id="{A366A6EF-EF66-426F-91B4-B9A288BC66B0}"/>
+              </a:ext>
+            </a:extLst>
+          </p:cNvPr>
+          <p:cNvSpPr>
+            <a:spLocks noGrp="1"/>
+          </p:cNvSpPr>
+          <p:nvPr>
+            <p:ph type="body" sz="quarter" idx="11"/>
+          </p:nvPr>
+        </p:nvSpPr>
+        <p:spPr/>
+        <p:txBody>
+          <a:bodyPr/>
+          <a:lstStyle/>
+          <a:p>
+            <a:r>
+              <a:rPr lang="en-US" dirty="0"/>
+              <a:t>Finished PCB component for use on new PCB</a:t>
+            </a:r>
+          </a:p>
+        </p:txBody>
+      </p:sp>
+      <p:sp>
+        <p:nvSpPr>
+          <p:cNvPr id="3" name="Text Placeholder 2">
+            <a:extLst>
+              <a:ext uri="{FF2B5EF4-FFF2-40B4-BE49-F238E27FC236}">
+                <a16:creationId xmlns:a16="http://schemas.microsoft.com/office/drawing/2014/main" id="{7B5FFB8E-2114-EB36-205D-E901EFD671FA}"/>
+              </a:ext>
+            </a:extLst>
+          </p:cNvPr>
+          <p:cNvSpPr>
+            <a:spLocks noGrp="1"/>
+          </p:cNvSpPr>
+          <p:nvPr>
+            <p:ph type="body" sz="quarter" idx="10"/>
+          </p:nvPr>
+        </p:nvSpPr>
+        <p:spPr/>
+        <p:txBody>
+          <a:bodyPr/>
+          <a:lstStyle/>
+          <a:p>
+            <a:pPr marL="285750" indent="-285750">
+              <a:buFont typeface="Arial" panose="020B0604020202020204" pitchFamily="34" charset="0"/>
+              <a:buChar char="•"/>
+            </a:pPr>
+            <a:r>
+              <a:rPr lang="en-US" dirty="0"/>
+              <a:t>Allowed correct spacing for the P1110b mounting holes</a:t>
+            </a:r>
+          </a:p>
+          <a:p>
+            <a:pPr marL="285750" indent="-285750">
+              <a:buFont typeface="Arial" panose="020B0604020202020204" pitchFamily="34" charset="0"/>
+              <a:buChar char="•"/>
+            </a:pPr>
+            <a:r>
+              <a:rPr lang="en-US" dirty="0"/>
+              <a:t>1 mm diameter mounting hole:</a:t>
+            </a:r>
+          </a:p>
+        </p:txBody>
+      </p:sp>
+      <p:sp>
+        <p:nvSpPr>
+          <p:cNvPr id="4" name="Title 3">
+            <a:extLst>
+              <a:ext uri="{FF2B5EF4-FFF2-40B4-BE49-F238E27FC236}">
+                <a16:creationId xmlns:a16="http://schemas.microsoft.com/office/drawing/2014/main" id="{5952232E-C77E-10B2-25E9-E3D5DCEE6528}"/>
+              </a:ext>
+            </a:extLst>
+          </p:cNvPr>
+          <p:cNvSpPr>
+            <a:spLocks noGrp="1"/>
+          </p:cNvSpPr>
+          <p:nvPr>
+            <p:ph type="title"/>
+          </p:nvPr>
+        </p:nvSpPr>
+        <p:spPr/>
+        <p:txBody>
+          <a:bodyPr/>
+          <a:lstStyle/>
+          <a:p>
+            <a:r>
+              <a:rPr lang="en-US" dirty="0"/>
+              <a:t>PCB Updates</a:t>
+            </a:r>
+          </a:p>
+        </p:txBody>
+      </p:sp>
+      <p:sp>
+        <p:nvSpPr>
+          <p:cNvPr id="5" name="Footer Placeholder 4">
+            <a:extLst>
+              <a:ext uri="{FF2B5EF4-FFF2-40B4-BE49-F238E27FC236}">
+                <a16:creationId xmlns:a16="http://schemas.microsoft.com/office/drawing/2014/main" id="{FC555E0D-BC57-D75A-C694-0E69F08562F2}"/>
+              </a:ext>
+            </a:extLst>
+          </p:cNvPr>
+          <p:cNvSpPr>
+            <a:spLocks noGrp="1"/>
+          </p:cNvSpPr>
+          <p:nvPr>
+            <p:ph type="ftr" sz="quarter" idx="12"/>
+          </p:nvPr>
+        </p:nvSpPr>
+        <p:spPr/>
+        <p:txBody>
+          <a:bodyPr/>
+          <a:lstStyle/>
+          <a:p>
+            <a:pPr algn="r"/>
+            <a:r>
+              <a:rPr lang="en-US" dirty="0"/>
+              <a:t>10/15</a:t>
+            </a:r>
+          </a:p>
+        </p:txBody>
+      </p:sp>
+      <p:pic>
+        <p:nvPicPr>
+          <p:cNvPr id="9" name="Picture 8">
+            <a:extLst>
+              <a:ext uri="{FF2B5EF4-FFF2-40B4-BE49-F238E27FC236}">
+                <a16:creationId xmlns:a16="http://schemas.microsoft.com/office/drawing/2014/main" id="{2EB21F3F-7B02-3752-F727-C172516E1E1A}"/>
+              </a:ext>
+            </a:extLst>
+          </p:cNvPr>
+          <p:cNvPicPr>
+            <a:picLocks noChangeAspect="1"/>
+          </p:cNvPicPr>
+          <p:nvPr/>
+        </p:nvPicPr>
+        <p:blipFill>
+          <a:blip r:embed="rId2"/>
+          <a:stretch>
+            <a:fillRect/>
+          </a:stretch>
+        </p:blipFill>
+        <p:spPr>
+          <a:xfrm>
+            <a:off x="50902" y="2439495"/>
+            <a:ext cx="4525180" cy="3464214"/>
+          </a:xfrm>
+          <a:prstGeom prst="rect">
+            <a:avLst/>
+          </a:prstGeom>
+        </p:spPr>
+      </p:pic>
+      <p:sp>
+        <p:nvSpPr>
+          <p:cNvPr id="10" name="Oval 9">
+            <a:extLst>
+              <a:ext uri="{FF2B5EF4-FFF2-40B4-BE49-F238E27FC236}">
+                <a16:creationId xmlns:a16="http://schemas.microsoft.com/office/drawing/2014/main" id="{FADBCDC2-EBAB-D71C-E266-0289DAB6416E}"/>
+              </a:ext>
+            </a:extLst>
+          </p:cNvPr>
+          <p:cNvSpPr/>
+          <p:nvPr/>
+        </p:nvSpPr>
+        <p:spPr>
+          <a:xfrm>
+            <a:off x="3546802" y="2526620"/>
+            <a:ext cx="1021115" cy="544647"/>
+          </a:xfrm>
+          <a:prstGeom prst="ellipse">
+            <a:avLst/>
+          </a:prstGeom>
+          <a:noFill/>
+          <a:ln w="38100">
+            <a:solidFill>
+              <a:srgbClr val="FF0000"/>
+            </a:solidFill>
+          </a:ln>
+        </p:spPr>
+        <p:style>
+          <a:lnRef idx="2">
+            <a:schemeClr val="dk1">
+              <a:shade val="50000"/>
+            </a:schemeClr>
+          </a:lnRef>
+          <a:fillRef idx="1">
+            <a:schemeClr val="dk1"/>
+          </a:fillRef>
+          <a:effectRef idx="0">
+            <a:schemeClr val="dk1"/>
+          </a:effectRef>
+          <a:fontRef idx="minor">
+            <a:schemeClr val="lt1"/>
+          </a:fontRef>
+        </p:style>
+        <p:txBody>
+          <a:bodyPr rtlCol="0" anchor="ctr"/>
+          <a:lstStyle/>
+          <a:p>
+            <a:pPr algn="ctr"/>
+            <a:endParaRPr lang="en-US">
+              <a:ln>
+                <a:solidFill>
+                  <a:srgbClr val="FF0000"/>
+                </a:solidFill>
+              </a:ln>
+              <a:noFill/>
+            </a:endParaRPr>
+          </a:p>
+        </p:txBody>
+      </p:sp>
+      <p:cxnSp>
+        <p:nvCxnSpPr>
+          <p:cNvPr id="11" name="Straight Arrow Connector 10">
+            <a:extLst>
+              <a:ext uri="{FF2B5EF4-FFF2-40B4-BE49-F238E27FC236}">
+                <a16:creationId xmlns:a16="http://schemas.microsoft.com/office/drawing/2014/main" id="{D9F344E9-5B21-394B-B6B5-1A97929641CD}"/>
+              </a:ext>
+            </a:extLst>
+          </p:cNvPr>
+          <p:cNvCxnSpPr>
+            <a:cxnSpLocks/>
+          </p:cNvCxnSpPr>
+          <p:nvPr/>
+        </p:nvCxnSpPr>
+        <p:spPr>
+          <a:xfrm>
+            <a:off x="3643640" y="2128947"/>
+            <a:ext cx="265245" cy="397673"/>
+          </a:xfrm>
+          <a:prstGeom prst="straightConnector1">
+            <a:avLst/>
+          </a:prstGeom>
+          <a:ln>
+            <a:solidFill>
+              <a:srgbClr val="FF0000"/>
+            </a:solidFill>
+            <a:tailEnd type="triangle"/>
+          </a:ln>
+        </p:spPr>
+        <p:style>
+          <a:lnRef idx="1">
+            <a:schemeClr val="accent1"/>
+          </a:lnRef>
+          <a:fillRef idx="0">
+            <a:schemeClr val="accent1"/>
+          </a:fillRef>
+          <a:effectRef idx="0">
+            <a:schemeClr val="accent1"/>
+          </a:effectRef>
+          <a:fontRef idx="minor">
+            <a:schemeClr val="tx1"/>
+          </a:fontRef>
+        </p:style>
+      </p:cxnSp>
+      <p:pic>
+        <p:nvPicPr>
+          <p:cNvPr id="15" name="Picture 14">
+            <a:extLst>
+              <a:ext uri="{FF2B5EF4-FFF2-40B4-BE49-F238E27FC236}">
+                <a16:creationId xmlns:a16="http://schemas.microsoft.com/office/drawing/2014/main" id="{F143F727-0755-9981-3F80-871F2A4922B9}"/>
+              </a:ext>
+            </a:extLst>
+          </p:cNvPr>
+          <p:cNvPicPr>
+            <a:picLocks noChangeAspect="1"/>
+          </p:cNvPicPr>
+          <p:nvPr/>
+        </p:nvPicPr>
+        <p:blipFill>
+          <a:blip r:embed="rId3"/>
+          <a:stretch>
+            <a:fillRect/>
+          </a:stretch>
+        </p:blipFill>
+        <p:spPr>
+          <a:xfrm>
+            <a:off x="4694086" y="2685143"/>
+            <a:ext cx="3668910" cy="3263900"/>
+          </a:xfrm>
+          <a:prstGeom prst="rect">
+            <a:avLst/>
+          </a:prstGeom>
+        </p:spPr>
+      </p:pic>
+    </p:spTree>
+    <p:extLst>
+      <p:ext uri="{BB962C8B-B14F-4D97-AF65-F5344CB8AC3E}">
+        <p14:creationId xmlns:p14="http://schemas.microsoft.com/office/powerpoint/2010/main" val="2044956797"/>
+      </p:ext>
+    </p:extLst>
+  </p:cSld>
+  <p:clrMapOvr>
+    <a:masterClrMapping/>
+  </p:clrMapOvr>
+</p:sld>
+</file>
+
+<file path=ppt/slides/slide11.xml><?xml version="1.0" encoding="utf-8"?>
+<p:sld xmlns:a="http://schemas.openxmlformats.org/drawingml/2006/main" xmlns:r="http://schemas.openxmlformats.org/officeDocument/2006/relationships" xmlns:p="http://schemas.openxmlformats.org/presentationml/2006/main">
+  <p:cSld>
+    <p:spTree>
+      <p:nvGrpSpPr>
+        <p:cNvPr id="1" name="">
+          <a:extLst>
+            <a:ext uri="{FF2B5EF4-FFF2-40B4-BE49-F238E27FC236}">
+              <a16:creationId xmlns:a16="http://schemas.microsoft.com/office/drawing/2014/main" id="{104D03ED-75C8-81D8-58DA-A49AC5F112C8}"/>
+            </a:ext>
+          </a:extLst>
+        </p:cNvPr>
+        <p:cNvGrpSpPr/>
+        <p:nvPr/>
+      </p:nvGrpSpPr>
+      <p:grpSpPr>
+        <a:xfrm>
+          <a:off x="0" y="0"/>
+          <a:ext cx="0" cy="0"/>
+          <a:chOff x="0" y="0"/>
+          <a:chExt cx="0" cy="0"/>
+        </a:xfrm>
+      </p:grpSpPr>
+      <p:sp>
+        <p:nvSpPr>
+          <p:cNvPr id="2" name="Text Placeholder 1">
+            <a:extLst>
+              <a:ext uri="{FF2B5EF4-FFF2-40B4-BE49-F238E27FC236}">
+                <a16:creationId xmlns:a16="http://schemas.microsoft.com/office/drawing/2014/main" id="{4D40FBD5-E949-1773-B638-2382F2505443}"/>
+              </a:ext>
+            </a:extLst>
+          </p:cNvPr>
+          <p:cNvSpPr>
+            <a:spLocks noGrp="1"/>
+          </p:cNvSpPr>
+          <p:nvPr>
+            <p:ph type="body" sz="quarter" idx="11"/>
+          </p:nvPr>
+        </p:nvSpPr>
+        <p:spPr/>
+        <p:txBody>
+          <a:bodyPr/>
+          <a:lstStyle/>
+          <a:p>
+            <a:r>
+              <a:rPr lang="en-US" dirty="0"/>
+              <a:t>PCB component added to design</a:t>
+            </a:r>
+          </a:p>
+        </p:txBody>
+      </p:sp>
+      <p:sp>
+        <p:nvSpPr>
+          <p:cNvPr id="3" name="Text Placeholder 2">
+            <a:extLst>
+              <a:ext uri="{FF2B5EF4-FFF2-40B4-BE49-F238E27FC236}">
+                <a16:creationId xmlns:a16="http://schemas.microsoft.com/office/drawing/2014/main" id="{2C7E18A1-869D-1CBB-C424-F1054438F180}"/>
+              </a:ext>
+            </a:extLst>
+          </p:cNvPr>
+          <p:cNvSpPr>
+            <a:spLocks noGrp="1"/>
+          </p:cNvSpPr>
+          <p:nvPr>
+            <p:ph type="body" sz="quarter" idx="10"/>
+          </p:nvPr>
+        </p:nvSpPr>
+        <p:spPr/>
+        <p:txBody>
+          <a:bodyPr/>
+          <a:lstStyle/>
+          <a:p>
+            <a:pPr marL="285750" indent="-285750">
+              <a:buFont typeface="Arial" panose="020B0604020202020204" pitchFamily="34" charset="0"/>
+              <a:buChar char="•"/>
+            </a:pPr>
+            <a:r>
+              <a:rPr lang="en-US" dirty="0"/>
+              <a:t>Relative sizing on the back of the PCB seen for reference:</a:t>
+            </a:r>
+          </a:p>
+          <a:p>
+            <a:pPr marL="285750" indent="-285750">
+              <a:buFont typeface="Arial" panose="020B0604020202020204" pitchFamily="34" charset="0"/>
+              <a:buChar char="•"/>
+            </a:pPr>
+            <a:r>
+              <a:rPr lang="en-US" dirty="0"/>
+              <a:t>Not a large component by any regard</a:t>
+            </a:r>
+          </a:p>
+        </p:txBody>
+      </p:sp>
+      <p:sp>
+        <p:nvSpPr>
+          <p:cNvPr id="4" name="Title 3">
+            <a:extLst>
+              <a:ext uri="{FF2B5EF4-FFF2-40B4-BE49-F238E27FC236}">
+                <a16:creationId xmlns:a16="http://schemas.microsoft.com/office/drawing/2014/main" id="{6F1A4DA6-9ABB-6675-1E2F-1544F48ECDE1}"/>
+              </a:ext>
+            </a:extLst>
+          </p:cNvPr>
+          <p:cNvSpPr>
+            <a:spLocks noGrp="1"/>
+          </p:cNvSpPr>
+          <p:nvPr>
+            <p:ph type="title"/>
+          </p:nvPr>
+        </p:nvSpPr>
+        <p:spPr/>
+        <p:txBody>
+          <a:bodyPr/>
+          <a:lstStyle/>
+          <a:p>
+            <a:r>
+              <a:rPr lang="en-US" dirty="0"/>
+              <a:t>PCB Updates</a:t>
+            </a:r>
+          </a:p>
+        </p:txBody>
+      </p:sp>
+      <p:sp>
+        <p:nvSpPr>
+          <p:cNvPr id="5" name="Footer Placeholder 4">
+            <a:extLst>
+              <a:ext uri="{FF2B5EF4-FFF2-40B4-BE49-F238E27FC236}">
+                <a16:creationId xmlns:a16="http://schemas.microsoft.com/office/drawing/2014/main" id="{E582B30C-01E9-B1DE-C698-CA639914B249}"/>
+              </a:ext>
+            </a:extLst>
+          </p:cNvPr>
+          <p:cNvSpPr>
+            <a:spLocks noGrp="1"/>
+          </p:cNvSpPr>
+          <p:nvPr>
+            <p:ph type="ftr" sz="quarter" idx="12"/>
+          </p:nvPr>
+        </p:nvSpPr>
+        <p:spPr/>
+        <p:txBody>
+          <a:bodyPr/>
+          <a:lstStyle/>
+          <a:p>
+            <a:pPr algn="r"/>
+            <a:r>
+              <a:rPr lang="en-US" dirty="0"/>
+              <a:t>11/15</a:t>
+            </a:r>
+          </a:p>
+        </p:txBody>
+      </p:sp>
+      <p:pic>
+        <p:nvPicPr>
+          <p:cNvPr id="7" name="Picture 6">
+            <a:extLst>
+              <a:ext uri="{FF2B5EF4-FFF2-40B4-BE49-F238E27FC236}">
+                <a16:creationId xmlns:a16="http://schemas.microsoft.com/office/drawing/2014/main" id="{6C762437-0DAE-9542-0BA4-0ED8471AEF40}"/>
+              </a:ext>
+            </a:extLst>
+          </p:cNvPr>
+          <p:cNvPicPr>
+            <a:picLocks noChangeAspect="1"/>
+          </p:cNvPicPr>
+          <p:nvPr/>
+        </p:nvPicPr>
+        <p:blipFill>
+          <a:blip r:embed="rId2"/>
+          <a:stretch>
+            <a:fillRect/>
+          </a:stretch>
+        </p:blipFill>
+        <p:spPr>
+          <a:xfrm>
+            <a:off x="2565400" y="2380857"/>
+            <a:ext cx="5207000" cy="3799886"/>
+          </a:xfrm>
+          <a:prstGeom prst="rect">
+            <a:avLst/>
+          </a:prstGeom>
+        </p:spPr>
+      </p:pic>
+      <p:sp>
+        <p:nvSpPr>
+          <p:cNvPr id="8" name="Oval 7">
+            <a:extLst>
+              <a:ext uri="{FF2B5EF4-FFF2-40B4-BE49-F238E27FC236}">
+                <a16:creationId xmlns:a16="http://schemas.microsoft.com/office/drawing/2014/main" id="{737A2A03-3A5E-DF8F-38A7-4133A1B7CAC5}"/>
+              </a:ext>
+            </a:extLst>
+          </p:cNvPr>
+          <p:cNvSpPr/>
+          <p:nvPr/>
+        </p:nvSpPr>
+        <p:spPr>
+          <a:xfrm>
+            <a:off x="5489902" y="3156676"/>
+            <a:ext cx="1850698" cy="2469424"/>
+          </a:xfrm>
+          <a:prstGeom prst="ellipse">
+            <a:avLst/>
+          </a:prstGeom>
+          <a:noFill/>
+          <a:ln w="38100">
+            <a:solidFill>
+              <a:srgbClr val="FF0000"/>
+            </a:solidFill>
+          </a:ln>
+        </p:spPr>
+        <p:style>
+          <a:lnRef idx="2">
+            <a:schemeClr val="dk1">
+              <a:shade val="50000"/>
+            </a:schemeClr>
+          </a:lnRef>
+          <a:fillRef idx="1">
+            <a:schemeClr val="dk1"/>
+          </a:fillRef>
+          <a:effectRef idx="0">
+            <a:schemeClr val="dk1"/>
+          </a:effectRef>
+          <a:fontRef idx="minor">
+            <a:schemeClr val="lt1"/>
+          </a:fontRef>
+        </p:style>
+        <p:txBody>
+          <a:bodyPr rtlCol="0" anchor="ctr"/>
+          <a:lstStyle/>
+          <a:p>
+            <a:pPr algn="ctr"/>
+            <a:endParaRPr lang="en-US">
+              <a:ln>
+                <a:solidFill>
+                  <a:srgbClr val="FF0000"/>
+                </a:solidFill>
+              </a:ln>
+              <a:noFill/>
+            </a:endParaRPr>
+          </a:p>
+        </p:txBody>
+      </p:sp>
+    </p:spTree>
+    <p:extLst>
+      <p:ext uri="{BB962C8B-B14F-4D97-AF65-F5344CB8AC3E}">
+        <p14:creationId xmlns:p14="http://schemas.microsoft.com/office/powerpoint/2010/main" val="3247041173"/>
+      </p:ext>
+    </p:extLst>
+  </p:cSld>
+  <p:clrMapOvr>
+    <a:masterClrMapping/>
+  </p:clrMapOvr>
+</p:sld>
+</file>
+
+<file path=ppt/slides/slide12.xml><?xml version="1.0" encoding="utf-8"?>
+<p:sld xmlns:a="http://schemas.openxmlformats.org/drawingml/2006/main" xmlns:r="http://schemas.openxmlformats.org/officeDocument/2006/relationships" xmlns:p="http://schemas.openxmlformats.org/presentationml/2006/main">
+  <p:cSld>
+    <p:spTree>
+      <p:nvGrpSpPr>
+        <p:cNvPr id="1" name=""/>
+        <p:cNvGrpSpPr/>
+        <p:nvPr/>
+      </p:nvGrpSpPr>
+      <p:grpSpPr>
+        <a:xfrm>
+          <a:off x="0" y="0"/>
+          <a:ext cx="0" cy="0"/>
+          <a:chOff x="0" y="0"/>
+          <a:chExt cx="0" cy="0"/>
+        </a:xfrm>
+      </p:grpSpPr>
+      <p:sp>
+        <p:nvSpPr>
+          <p:cNvPr id="2" name="Text Placeholder 1">
+            <a:extLst>
+              <a:ext uri="{FF2B5EF4-FFF2-40B4-BE49-F238E27FC236}">
+                <a16:creationId xmlns:a16="http://schemas.microsoft.com/office/drawing/2014/main" id="{7BD68FEA-F426-9CB2-5879-BBC8AE2577E0}"/>
+              </a:ext>
+            </a:extLst>
+          </p:cNvPr>
+          <p:cNvSpPr>
+            <a:spLocks noGrp="1"/>
+          </p:cNvSpPr>
+          <p:nvPr>
+            <p:ph type="body" sz="quarter" idx="11"/>
+          </p:nvPr>
+        </p:nvSpPr>
+        <p:spPr/>
+        <p:txBody>
+          <a:bodyPr/>
+          <a:lstStyle/>
+          <a:p>
+            <a:r>
+              <a:rPr lang="en-US" dirty="0"/>
+              <a:t>MongoDB database collection method started</a:t>
+            </a:r>
+          </a:p>
+        </p:txBody>
+      </p:sp>
+      <p:sp>
+        <p:nvSpPr>
+          <p:cNvPr id="3" name="Text Placeholder 2">
+            <a:extLst>
+              <a:ext uri="{FF2B5EF4-FFF2-40B4-BE49-F238E27FC236}">
+                <a16:creationId xmlns:a16="http://schemas.microsoft.com/office/drawing/2014/main" id="{EFC7A381-286A-EEF1-65A0-74E3FBA7DF73}"/>
+              </a:ext>
+            </a:extLst>
+          </p:cNvPr>
+          <p:cNvSpPr>
+            <a:spLocks noGrp="1"/>
+          </p:cNvSpPr>
+          <p:nvPr>
+            <p:ph type="body" sz="quarter" idx="10"/>
+          </p:nvPr>
+        </p:nvSpPr>
+        <p:spPr/>
+        <p:txBody>
+          <a:bodyPr/>
+          <a:lstStyle/>
+          <a:p>
+            <a:pPr marL="285750" indent="-285750">
+              <a:buFont typeface="Arial" panose="020B0604020202020204" pitchFamily="34" charset="0"/>
+              <a:buChar char="•"/>
+            </a:pPr>
+            <a:r>
+              <a:rPr lang="en-US" dirty="0"/>
+              <a:t>Data collection method </a:t>
+            </a:r>
+            <a:r>
+              <a:rPr lang="en-US" u="sng" dirty="0"/>
+              <a:t>3</a:t>
+            </a:r>
+          </a:p>
+          <a:p>
+            <a:pPr marL="628650" lvl="1" indent="-285750">
+              <a:buFont typeface="Arial" panose="020B0604020202020204" pitchFamily="34" charset="0"/>
+              <a:buChar char="•"/>
+            </a:pPr>
+            <a:r>
+              <a:rPr lang="en-US" dirty="0"/>
+              <a:t>Cloud Storage:</a:t>
+            </a:r>
+          </a:p>
+          <a:p>
+            <a:pPr marL="628650" lvl="1" indent="-285750">
+              <a:buFont typeface="Arial" panose="020B0604020202020204" pitchFamily="34" charset="0"/>
+              <a:buChar char="•"/>
+            </a:pPr>
+            <a:r>
+              <a:rPr lang="en-US" u="sng" dirty="0"/>
+              <a:t>Operation: </a:t>
+            </a:r>
+            <a:r>
+              <a:rPr lang="en-US" dirty="0"/>
+              <a:t>Data would be immediately backed up to the cloud or another service</a:t>
+            </a:r>
+          </a:p>
+          <a:p>
+            <a:pPr marL="628650" lvl="1" indent="-285750">
+              <a:buFont typeface="Arial" panose="020B0604020202020204" pitchFamily="34" charset="0"/>
+              <a:buChar char="•"/>
+            </a:pPr>
+            <a:r>
+              <a:rPr lang="en-US" u="sng" dirty="0"/>
+              <a:t>Collection: </a:t>
+            </a:r>
+            <a:r>
+              <a:rPr lang="en-US" dirty="0"/>
+              <a:t>A remote login would be needed to access data, nothing else</a:t>
+            </a:r>
+          </a:p>
+          <a:p>
+            <a:pPr marL="285750" indent="-285750">
+              <a:buFont typeface="Arial" panose="020B0604020202020204" pitchFamily="34" charset="0"/>
+              <a:buChar char="•"/>
+            </a:pPr>
+            <a:r>
+              <a:rPr lang="en-US" dirty="0"/>
+              <a:t>Potential Solution: </a:t>
+            </a:r>
+            <a:r>
+              <a:rPr lang="en-US" u="sng" dirty="0"/>
+              <a:t>MongoDB</a:t>
+            </a:r>
+            <a:endParaRPr lang="en-US" dirty="0"/>
+          </a:p>
+          <a:p>
+            <a:pPr marL="628650" lvl="1" indent="-285750">
+              <a:buFont typeface="Arial" panose="020B0604020202020204" pitchFamily="34" charset="0"/>
+              <a:buChar char="•"/>
+            </a:pPr>
+            <a:r>
+              <a:rPr lang="en-US" dirty="0"/>
+              <a:t>Runs off AWS servers</a:t>
+            </a:r>
+          </a:p>
+          <a:p>
+            <a:pPr marL="628650" lvl="1" indent="-285750">
+              <a:buFont typeface="Arial" panose="020B0604020202020204" pitchFamily="34" charset="0"/>
+              <a:buChar char="•"/>
+            </a:pPr>
+            <a:r>
+              <a:rPr lang="en-US" dirty="0"/>
+              <a:t>Free for immediate use (No large-scale data)</a:t>
+            </a:r>
+          </a:p>
+          <a:p>
+            <a:pPr marL="628650" lvl="1" indent="-285750">
+              <a:buFont typeface="Arial" panose="020B0604020202020204" pitchFamily="34" charset="0"/>
+              <a:buChar char="•"/>
+            </a:pPr>
+            <a:r>
+              <a:rPr lang="en-US" dirty="0"/>
+              <a:t>Perfect for an intermediate cloud solution that is easy to maintain</a:t>
+            </a:r>
+          </a:p>
+          <a:p>
+            <a:pPr marL="628650" lvl="1" indent="-285750">
+              <a:buFont typeface="Arial" panose="020B0604020202020204" pitchFamily="34" charset="0"/>
+              <a:buChar char="•"/>
+            </a:pPr>
+            <a:r>
+              <a:rPr lang="en-US" dirty="0"/>
+              <a:t>Data can be pulled from the database without having to connect to a Nicla BLE device</a:t>
+            </a:r>
+          </a:p>
+        </p:txBody>
+      </p:sp>
+      <p:sp>
+        <p:nvSpPr>
+          <p:cNvPr id="4" name="Title 3">
+            <a:extLst>
+              <a:ext uri="{FF2B5EF4-FFF2-40B4-BE49-F238E27FC236}">
+                <a16:creationId xmlns:a16="http://schemas.microsoft.com/office/drawing/2014/main" id="{1C98C8AC-2F25-D3E1-D653-5175A4C61B61}"/>
+              </a:ext>
+            </a:extLst>
+          </p:cNvPr>
+          <p:cNvSpPr>
+            <a:spLocks noGrp="1"/>
+          </p:cNvSpPr>
+          <p:nvPr>
+            <p:ph type="title"/>
+          </p:nvPr>
+        </p:nvSpPr>
+        <p:spPr/>
+        <p:txBody>
+          <a:bodyPr/>
+          <a:lstStyle/>
+          <a:p>
+            <a:r>
+              <a:rPr lang="en-US" dirty="0"/>
+              <a:t>Database Updates</a:t>
+            </a:r>
+          </a:p>
+        </p:txBody>
+      </p:sp>
+      <p:sp>
+        <p:nvSpPr>
+          <p:cNvPr id="5" name="Footer Placeholder 4">
+            <a:extLst>
+              <a:ext uri="{FF2B5EF4-FFF2-40B4-BE49-F238E27FC236}">
+                <a16:creationId xmlns:a16="http://schemas.microsoft.com/office/drawing/2014/main" id="{BA180FFB-784B-3A4C-3E86-CA81C9627E4B}"/>
+              </a:ext>
+            </a:extLst>
+          </p:cNvPr>
+          <p:cNvSpPr>
+            <a:spLocks noGrp="1"/>
+          </p:cNvSpPr>
+          <p:nvPr>
+            <p:ph type="ftr" sz="quarter" idx="12"/>
+          </p:nvPr>
+        </p:nvSpPr>
+        <p:spPr/>
+        <p:txBody>
+          <a:bodyPr/>
+          <a:lstStyle/>
+          <a:p>
+            <a:pPr algn="r"/>
+            <a:r>
+              <a:rPr lang="en-US" dirty="0"/>
+              <a:t>12/15</a:t>
+            </a:r>
+          </a:p>
+        </p:txBody>
+      </p:sp>
+      <p:pic>
+        <p:nvPicPr>
+          <p:cNvPr id="1026" name="Picture 2" descr="MongoDB Monitoring and Performance Management | IBM">
+            <a:extLst>
+              <a:ext uri="{FF2B5EF4-FFF2-40B4-BE49-F238E27FC236}">
+                <a16:creationId xmlns:a16="http://schemas.microsoft.com/office/drawing/2014/main" id="{21EA0086-7737-43B3-92D4-4F2078FEF9A0}"/>
+              </a:ext>
+            </a:extLst>
+          </p:cNvPr>
+          <p:cNvPicPr>
+            <a:picLocks noChangeAspect="1" noChangeArrowheads="1"/>
+          </p:cNvPicPr>
+          <p:nvPr/>
+        </p:nvPicPr>
+        <p:blipFill>
+          <a:blip r:embed="rId2">
+            <a:extLst>
+              <a:ext uri="{28A0092B-C50C-407E-A947-70E740481C1C}">
+                <a14:useLocalDpi xmlns:a14="http://schemas.microsoft.com/office/drawing/2010/main" val="0"/>
+              </a:ext>
+            </a:extLst>
+          </a:blip>
+          <a:srcRect/>
+          <a:stretch>
+            <a:fillRect/>
+          </a:stretch>
+        </p:blipFill>
+        <p:spPr bwMode="auto">
+          <a:xfrm>
+            <a:off x="5892800" y="4393926"/>
+            <a:ext cx="2025649" cy="1525102"/>
+          </a:xfrm>
+          <a:prstGeom prst="rect">
+            <a:avLst/>
+          </a:prstGeom>
+          <a:noFill/>
+          <a:extLst>
+            <a:ext uri="{909E8E84-426E-40DD-AFC4-6F175D3DCCD1}">
+              <a14:hiddenFill xmlns:a14="http://schemas.microsoft.com/office/drawing/2010/main">
+                <a:solidFill>
+                  <a:srgbClr val="FFFFFF"/>
+                </a:solidFill>
+              </a14:hiddenFill>
+            </a:ext>
+          </a:extLst>
+        </p:spPr>
+      </p:pic>
+    </p:spTree>
+    <p:extLst>
+      <p:ext uri="{BB962C8B-B14F-4D97-AF65-F5344CB8AC3E}">
+        <p14:creationId xmlns:p14="http://schemas.microsoft.com/office/powerpoint/2010/main" val="4001583228"/>
+      </p:ext>
+    </p:extLst>
+  </p:cSld>
+  <p:clrMapOvr>
+    <a:masterClrMapping/>
+  </p:clrMapOvr>
+</p:sld>
+</file>
+
+<file path=ppt/slides/slide13.xml><?xml version="1.0" encoding="utf-8"?>
+<p:sld xmlns:a="http://schemas.openxmlformats.org/drawingml/2006/main" xmlns:r="http://schemas.openxmlformats.org/officeDocument/2006/relationships" xmlns:p="http://schemas.openxmlformats.org/presentationml/2006/main">
+  <p:cSld>
+    <p:spTree>
+      <p:nvGrpSpPr>
+        <p:cNvPr id="1" name="">
+          <a:extLst>
+            <a:ext uri="{FF2B5EF4-FFF2-40B4-BE49-F238E27FC236}">
+              <a16:creationId xmlns:a16="http://schemas.microsoft.com/office/drawing/2014/main" id="{F6AFE852-E406-3A8D-41D0-CC2ECF4B7DE0}"/>
+            </a:ext>
+          </a:extLst>
+        </p:cNvPr>
+        <p:cNvGrpSpPr/>
+        <p:nvPr/>
+      </p:nvGrpSpPr>
+      <p:grpSpPr>
+        <a:xfrm>
+          <a:off x="0" y="0"/>
+          <a:ext cx="0" cy="0"/>
+          <a:chOff x="0" y="0"/>
+          <a:chExt cx="0" cy="0"/>
+        </a:xfrm>
+      </p:grpSpPr>
+      <p:sp>
+        <p:nvSpPr>
+          <p:cNvPr id="2" name="Text Placeholder 1">
+            <a:extLst>
+              <a:ext uri="{FF2B5EF4-FFF2-40B4-BE49-F238E27FC236}">
+                <a16:creationId xmlns:a16="http://schemas.microsoft.com/office/drawing/2014/main" id="{EF40E99C-F778-B6CD-D774-4BB90348D91E}"/>
+              </a:ext>
+            </a:extLst>
+          </p:cNvPr>
+          <p:cNvSpPr>
+            <a:spLocks noGrp="1"/>
+          </p:cNvSpPr>
+          <p:nvPr>
+            <p:ph type="body" sz="quarter" idx="11"/>
+          </p:nvPr>
+        </p:nvSpPr>
+        <p:spPr/>
+        <p:txBody>
+          <a:bodyPr/>
+          <a:lstStyle/>
+          <a:p>
+            <a:r>
+              <a:rPr lang="en-US" dirty="0"/>
+              <a:t>MongoDB database collection method started</a:t>
+            </a:r>
+          </a:p>
+        </p:txBody>
+      </p:sp>
+      <p:sp>
+        <p:nvSpPr>
+          <p:cNvPr id="3" name="Text Placeholder 2">
+            <a:extLst>
+              <a:ext uri="{FF2B5EF4-FFF2-40B4-BE49-F238E27FC236}">
+                <a16:creationId xmlns:a16="http://schemas.microsoft.com/office/drawing/2014/main" id="{DE72CB5E-3697-943F-FB99-DE667B3BCE55}"/>
+              </a:ext>
+            </a:extLst>
+          </p:cNvPr>
+          <p:cNvSpPr>
+            <a:spLocks noGrp="1"/>
+          </p:cNvSpPr>
+          <p:nvPr>
+            <p:ph type="body" sz="quarter" idx="10"/>
+          </p:nvPr>
+        </p:nvSpPr>
+        <p:spPr/>
+        <p:txBody>
+          <a:bodyPr/>
+          <a:lstStyle/>
+          <a:p>
+            <a:pPr marL="285750" indent="-285750">
+              <a:buFont typeface="Arial" panose="020B0604020202020204" pitchFamily="34" charset="0"/>
+              <a:buChar char="•"/>
+            </a:pPr>
+            <a:r>
+              <a:rPr lang="en-US" dirty="0"/>
+              <a:t>Created Cluster (</a:t>
+            </a:r>
+            <a:r>
+              <a:rPr lang="en-US" dirty="0" err="1"/>
+              <a:t>Keel_Bone_Study_Database</a:t>
+            </a:r>
+            <a:r>
+              <a:rPr lang="en-US" dirty="0"/>
+              <a:t>) for collecting data through MongoDB servers</a:t>
+            </a:r>
+          </a:p>
+          <a:p>
+            <a:pPr marL="285750" indent="-285750">
+              <a:buFont typeface="Arial" panose="020B0604020202020204" pitchFamily="34" charset="0"/>
+              <a:buChar char="•"/>
+            </a:pPr>
+            <a:r>
+              <a:rPr lang="en-US" dirty="0"/>
+              <a:t>Free for now, up to 0.5 GB (.csv files on the order of 0.0001 Gb (0.02%)</a:t>
+            </a:r>
+          </a:p>
+          <a:p>
+            <a:pPr marL="285750" indent="-285750">
+              <a:buFont typeface="Arial" panose="020B0604020202020204" pitchFamily="34" charset="0"/>
+              <a:buChar char="•"/>
+            </a:pPr>
+            <a:r>
+              <a:rPr lang="en-US" dirty="0"/>
+              <a:t>Shouldn’t exceed the limits with the size of .csv files collected</a:t>
+            </a:r>
+          </a:p>
+          <a:p>
+            <a:pPr marL="628650" lvl="1" indent="-285750">
+              <a:buFont typeface="Arial" panose="020B0604020202020204" pitchFamily="34" charset="0"/>
+              <a:buChar char="•"/>
+            </a:pPr>
+            <a:endParaRPr lang="en-US" dirty="0"/>
+          </a:p>
+        </p:txBody>
+      </p:sp>
+      <p:sp>
+        <p:nvSpPr>
+          <p:cNvPr id="4" name="Title 3">
+            <a:extLst>
+              <a:ext uri="{FF2B5EF4-FFF2-40B4-BE49-F238E27FC236}">
+                <a16:creationId xmlns:a16="http://schemas.microsoft.com/office/drawing/2014/main" id="{6C721F94-4CE8-5E68-4227-38B87174A3C4}"/>
+              </a:ext>
+            </a:extLst>
+          </p:cNvPr>
+          <p:cNvSpPr>
+            <a:spLocks noGrp="1"/>
+          </p:cNvSpPr>
+          <p:nvPr>
+            <p:ph type="title"/>
+          </p:nvPr>
+        </p:nvSpPr>
+        <p:spPr/>
+        <p:txBody>
+          <a:bodyPr/>
+          <a:lstStyle/>
+          <a:p>
+            <a:r>
+              <a:rPr lang="en-US" dirty="0"/>
+              <a:t>Database Updates</a:t>
+            </a:r>
+          </a:p>
+        </p:txBody>
+      </p:sp>
+      <p:sp>
+        <p:nvSpPr>
+          <p:cNvPr id="5" name="Footer Placeholder 4">
+            <a:extLst>
+              <a:ext uri="{FF2B5EF4-FFF2-40B4-BE49-F238E27FC236}">
+                <a16:creationId xmlns:a16="http://schemas.microsoft.com/office/drawing/2014/main" id="{5C785747-16BE-4D0D-B261-C61683D8A689}"/>
+              </a:ext>
+            </a:extLst>
+          </p:cNvPr>
+          <p:cNvSpPr>
+            <a:spLocks noGrp="1"/>
+          </p:cNvSpPr>
+          <p:nvPr>
+            <p:ph type="ftr" sz="quarter" idx="12"/>
+          </p:nvPr>
+        </p:nvSpPr>
+        <p:spPr/>
+        <p:txBody>
+          <a:bodyPr/>
+          <a:lstStyle/>
+          <a:p>
+            <a:pPr algn="r"/>
+            <a:r>
+              <a:rPr lang="en-US" dirty="0"/>
+              <a:t>13/15</a:t>
+            </a:r>
+          </a:p>
+        </p:txBody>
+      </p:sp>
+      <p:pic>
+        <p:nvPicPr>
+          <p:cNvPr id="7" name="Picture 6">
+            <a:extLst>
+              <a:ext uri="{FF2B5EF4-FFF2-40B4-BE49-F238E27FC236}">
+                <a16:creationId xmlns:a16="http://schemas.microsoft.com/office/drawing/2014/main" id="{6D70864C-03A4-BE02-DD52-EBA1091A4996}"/>
+              </a:ext>
+            </a:extLst>
+          </p:cNvPr>
+          <p:cNvPicPr>
+            <a:picLocks noChangeAspect="1"/>
+          </p:cNvPicPr>
+          <p:nvPr/>
+        </p:nvPicPr>
+        <p:blipFill>
+          <a:blip r:embed="rId2"/>
+          <a:stretch>
+            <a:fillRect/>
+          </a:stretch>
+        </p:blipFill>
+        <p:spPr>
+          <a:xfrm>
+            <a:off x="1074890" y="2838605"/>
+            <a:ext cx="6151410" cy="3307940"/>
+          </a:xfrm>
+          <a:prstGeom prst="rect">
+            <a:avLst/>
+          </a:prstGeom>
+        </p:spPr>
+      </p:pic>
+    </p:spTree>
+    <p:extLst>
+      <p:ext uri="{BB962C8B-B14F-4D97-AF65-F5344CB8AC3E}">
+        <p14:creationId xmlns:p14="http://schemas.microsoft.com/office/powerpoint/2010/main" val="2185879385"/>
+      </p:ext>
+    </p:extLst>
+  </p:cSld>
+  <p:clrMapOvr>
+    <a:masterClrMapping/>
+  </p:clrMapOvr>
+</p:sld>
+</file>
+
+<file path=ppt/slides/slide14.xml><?xml version="1.0" encoding="utf-8"?>
+<p:sld xmlns:a="http://schemas.openxmlformats.org/drawingml/2006/main" xmlns:r="http://schemas.openxmlformats.org/officeDocument/2006/relationships" xmlns:p="http://schemas.openxmlformats.org/presentationml/2006/main">
+  <p:cSld>
+    <p:spTree>
+      <p:nvGrpSpPr>
+        <p:cNvPr id="1" name=""/>
+        <p:cNvGrpSpPr/>
+        <p:nvPr/>
+      </p:nvGrpSpPr>
+      <p:grpSpPr>
+        <a:xfrm>
+          <a:off x="0" y="0"/>
+          <a:ext cx="0" cy="0"/>
+          <a:chOff x="0" y="0"/>
+          <a:chExt cx="0" cy="0"/>
+        </a:xfrm>
+      </p:grpSpPr>
+      <p:sp>
+        <p:nvSpPr>
+          <p:cNvPr id="2" name="Text Placeholder 1">
+            <a:extLst>
+              <a:ext uri="{FF2B5EF4-FFF2-40B4-BE49-F238E27FC236}">
+                <a16:creationId xmlns:a16="http://schemas.microsoft.com/office/drawing/2014/main" id="{0CD72587-DF24-E361-3C87-CFAE3C408C3A}"/>
+              </a:ext>
+            </a:extLst>
+          </p:cNvPr>
+          <p:cNvSpPr>
+            <a:spLocks noGrp="1"/>
+          </p:cNvSpPr>
+          <p:nvPr>
+            <p:ph type="body" sz="quarter" idx="11"/>
+          </p:nvPr>
+        </p:nvSpPr>
+        <p:spPr/>
+        <p:txBody>
+          <a:bodyPr/>
+          <a:lstStyle/>
+          <a:p>
+            <a:r>
+              <a:rPr lang="en-US" dirty="0"/>
+              <a:t>Next Week’s Plan</a:t>
+            </a:r>
+          </a:p>
+        </p:txBody>
+      </p:sp>
+      <p:sp>
+        <p:nvSpPr>
+          <p:cNvPr id="3" name="Text Placeholder 2">
+            <a:extLst>
+              <a:ext uri="{FF2B5EF4-FFF2-40B4-BE49-F238E27FC236}">
+                <a16:creationId xmlns:a16="http://schemas.microsoft.com/office/drawing/2014/main" id="{54C18513-FBE2-EBBB-125E-FA48BA6B1BEC}"/>
+              </a:ext>
+            </a:extLst>
+          </p:cNvPr>
+          <p:cNvSpPr>
+            <a:spLocks noGrp="1"/>
+          </p:cNvSpPr>
+          <p:nvPr>
+            <p:ph type="body" sz="quarter" idx="10"/>
+          </p:nvPr>
+        </p:nvSpPr>
+        <p:spPr/>
+        <p:txBody>
+          <a:bodyPr/>
+          <a:lstStyle/>
+          <a:p>
+            <a:pPr marL="628650" lvl="1" indent="-285750">
+              <a:buFont typeface="Arial" panose="020B0604020202020204" pitchFamily="34" charset="0"/>
+              <a:buChar char="•"/>
+            </a:pPr>
+            <a:endParaRPr lang="en-US" dirty="0"/>
+          </a:p>
+          <a:p>
+            <a:pPr marL="285750" indent="-285750">
+              <a:buFont typeface="Arial" panose="020B0604020202020204" pitchFamily="34" charset="0"/>
+              <a:buChar char="•"/>
+            </a:pPr>
+            <a:endParaRPr lang="en-US" dirty="0"/>
+          </a:p>
+          <a:p>
+            <a:pPr marL="285750" indent="-285750">
+              <a:buFont typeface="Arial" panose="020B0604020202020204" pitchFamily="34" charset="0"/>
+              <a:buChar char="•"/>
+            </a:pPr>
+            <a:endParaRPr lang="en-US" dirty="0"/>
+          </a:p>
+        </p:txBody>
+      </p:sp>
+      <p:sp>
+        <p:nvSpPr>
+          <p:cNvPr id="4" name="Title 3">
+            <a:extLst>
+              <a:ext uri="{FF2B5EF4-FFF2-40B4-BE49-F238E27FC236}">
+                <a16:creationId xmlns:a16="http://schemas.microsoft.com/office/drawing/2014/main" id="{38C5F57F-D41F-FAF8-68C5-CD8D95AF87F4}"/>
+              </a:ext>
+            </a:extLst>
+          </p:cNvPr>
+          <p:cNvSpPr>
+            <a:spLocks noGrp="1"/>
+          </p:cNvSpPr>
+          <p:nvPr>
+            <p:ph type="title"/>
+          </p:nvPr>
+        </p:nvSpPr>
+        <p:spPr/>
+        <p:txBody>
+          <a:bodyPr/>
+          <a:lstStyle/>
+          <a:p>
+            <a:r>
+              <a:rPr lang="en-US" dirty="0"/>
+              <a:t>Next Week</a:t>
+            </a:r>
+          </a:p>
+        </p:txBody>
+      </p:sp>
+      <p:sp>
+        <p:nvSpPr>
+          <p:cNvPr id="5" name="Footer Placeholder 4">
+            <a:extLst>
+              <a:ext uri="{FF2B5EF4-FFF2-40B4-BE49-F238E27FC236}">
+                <a16:creationId xmlns:a16="http://schemas.microsoft.com/office/drawing/2014/main" id="{8E633180-B8A6-C9B8-09AC-F39A8DDB0F4A}"/>
+              </a:ext>
+            </a:extLst>
+          </p:cNvPr>
+          <p:cNvSpPr>
+            <a:spLocks noGrp="1"/>
+          </p:cNvSpPr>
+          <p:nvPr>
+            <p:ph type="ftr" sz="quarter" idx="12"/>
+          </p:nvPr>
+        </p:nvSpPr>
+        <p:spPr/>
+        <p:txBody>
+          <a:bodyPr/>
+          <a:lstStyle/>
+          <a:p>
+            <a:pPr algn="r"/>
+            <a:r>
+              <a:rPr lang="en-US" dirty="0"/>
+              <a:t>14/15</a:t>
+            </a:r>
+          </a:p>
+        </p:txBody>
+      </p:sp>
+      <p:sp>
+        <p:nvSpPr>
+          <p:cNvPr id="6" name="Text Placeholder 2">
+            <a:extLst>
+              <a:ext uri="{FF2B5EF4-FFF2-40B4-BE49-F238E27FC236}">
+                <a16:creationId xmlns:a16="http://schemas.microsoft.com/office/drawing/2014/main" id="{88677F4A-0EE5-8488-2CEF-7324D0597EC2}"/>
+              </a:ext>
+            </a:extLst>
+          </p:cNvPr>
+          <p:cNvSpPr txBox="1">
+            <a:spLocks/>
+          </p:cNvSpPr>
+          <p:nvPr/>
+        </p:nvSpPr>
+        <p:spPr>
+          <a:xfrm>
+            <a:off x="495300" y="1695724"/>
+            <a:ext cx="8450035" cy="4454706"/>
+          </a:xfrm>
+          <a:prstGeom prst="rect">
+            <a:avLst/>
+          </a:prstGeom>
+        </p:spPr>
+        <p:txBody>
+          <a:bodyPr vert="horz" lIns="91440" tIns="45720" rIns="91440" bIns="45720" numCol="1" rtlCol="0">
+            <a:noAutofit/>
+          </a:bodyPr>
+          <a:lstStyle>
+            <a:lvl1pPr marL="0" indent="0" algn="l" defTabSz="685800" rtl="0" eaLnBrk="1" fontAlgn="t" latinLnBrk="0" hangingPunct="1">
+              <a:lnSpc>
+                <a:spcPct val="90000"/>
+              </a:lnSpc>
+              <a:spcBef>
+                <a:spcPts val="750"/>
+              </a:spcBef>
+              <a:buFontTx/>
+              <a:buNone/>
+              <a:defRPr sz="1800" b="0" i="0" kern="1200" baseline="0">
+                <a:solidFill>
+                  <a:schemeClr val="tx1"/>
+                </a:solidFill>
+                <a:latin typeface="Acumin Pro" panose="020B0504020202020204" pitchFamily="34" charset="77"/>
+                <a:ea typeface="+mn-ea"/>
+                <a:cs typeface="+mn-cs"/>
+              </a:defRPr>
+            </a:lvl1pPr>
+            <a:lvl2pPr marL="342900" indent="0" algn="l" defTabSz="685800" rtl="0" eaLnBrk="1" latinLnBrk="0" hangingPunct="1">
+              <a:lnSpc>
+                <a:spcPct val="90000"/>
+              </a:lnSpc>
+              <a:spcBef>
+                <a:spcPts val="375"/>
+              </a:spcBef>
+              <a:buFontTx/>
+              <a:buNone/>
+              <a:defRPr sz="1350" b="0" i="0" kern="1200" baseline="0">
+                <a:solidFill>
+                  <a:schemeClr val="tx1"/>
+                </a:solidFill>
+                <a:latin typeface="+mn-lt"/>
+                <a:ea typeface="+mn-ea"/>
+                <a:cs typeface="+mn-cs"/>
+              </a:defRPr>
+            </a:lvl2pPr>
+            <a:lvl3pPr marL="685800" indent="0" algn="l" defTabSz="685800" rtl="0" eaLnBrk="1" latinLnBrk="0" hangingPunct="1">
+              <a:lnSpc>
+                <a:spcPct val="90000"/>
+              </a:lnSpc>
+              <a:spcBef>
+                <a:spcPts val="375"/>
+              </a:spcBef>
+              <a:buFontTx/>
+              <a:buNone/>
+              <a:defRPr sz="1350" b="0" i="0" kern="1200" baseline="0">
+                <a:solidFill>
+                  <a:schemeClr val="tx1"/>
+                </a:solidFill>
+                <a:latin typeface="+mn-lt"/>
+                <a:ea typeface="+mn-ea"/>
+                <a:cs typeface="+mn-cs"/>
+              </a:defRPr>
+            </a:lvl3pPr>
+            <a:lvl4pPr marL="1028700" indent="0" algn="l" defTabSz="685800" rtl="0" eaLnBrk="1" latinLnBrk="0" hangingPunct="1">
+              <a:lnSpc>
+                <a:spcPct val="90000"/>
+              </a:lnSpc>
+              <a:spcBef>
+                <a:spcPts val="375"/>
+              </a:spcBef>
+              <a:buFontTx/>
+              <a:buNone/>
+              <a:defRPr sz="1350" b="0" i="0" kern="1200" baseline="0">
+                <a:solidFill>
+                  <a:schemeClr val="tx1"/>
+                </a:solidFill>
+                <a:latin typeface="+mn-lt"/>
+                <a:ea typeface="+mn-ea"/>
+                <a:cs typeface="+mn-cs"/>
+              </a:defRPr>
+            </a:lvl4pPr>
+            <a:lvl5pPr marL="1371600" indent="0" algn="l" defTabSz="685800" rtl="0" eaLnBrk="1" latinLnBrk="0" hangingPunct="1">
+              <a:lnSpc>
+                <a:spcPct val="90000"/>
+              </a:lnSpc>
+              <a:spcBef>
+                <a:spcPts val="375"/>
+              </a:spcBef>
+              <a:buFontTx/>
+              <a:buNone/>
+              <a:defRPr sz="1350" b="0" i="0" kern="1200" baseline="0">
+                <a:solidFill>
+                  <a:schemeClr val="tx1"/>
+                </a:solidFill>
+                <a:latin typeface="+mn-lt"/>
+                <a:ea typeface="+mn-ea"/>
+                <a:cs typeface="+mn-cs"/>
+              </a:defRPr>
+            </a:lvl5pPr>
+            <a:lvl6pPr marL="1885950" indent="-171450" algn="l" defTabSz="685800" rtl="0" eaLnBrk="1" latinLnBrk="0" hangingPunct="1">
+              <a:lnSpc>
+                <a:spcPct val="90000"/>
+              </a:lnSpc>
+              <a:spcBef>
+                <a:spcPts val="375"/>
+              </a:spcBef>
+              <a:buFont typeface="Arial" panose="020B0604020202020204" pitchFamily="34" charset="0"/>
+              <a:buChar char="•"/>
+              <a:defRPr sz="1350" kern="1200">
+                <a:solidFill>
+                  <a:schemeClr val="tx1"/>
+                </a:solidFill>
+                <a:latin typeface="+mn-lt"/>
+                <a:ea typeface="+mn-ea"/>
+                <a:cs typeface="+mn-cs"/>
+              </a:defRPr>
+            </a:lvl6pPr>
+            <a:lvl7pPr marL="2228850" indent="-171450" algn="l" defTabSz="685800" rtl="0" eaLnBrk="1" latinLnBrk="0" hangingPunct="1">
+              <a:lnSpc>
+                <a:spcPct val="90000"/>
+              </a:lnSpc>
+              <a:spcBef>
+                <a:spcPts val="375"/>
+              </a:spcBef>
+              <a:buFont typeface="Arial" panose="020B0604020202020204" pitchFamily="34" charset="0"/>
+              <a:buChar char="•"/>
+              <a:defRPr sz="1350" kern="1200">
+                <a:solidFill>
+                  <a:schemeClr val="tx1"/>
+                </a:solidFill>
+                <a:latin typeface="+mn-lt"/>
+                <a:ea typeface="+mn-ea"/>
+                <a:cs typeface="+mn-cs"/>
+              </a:defRPr>
+            </a:lvl7pPr>
+            <a:lvl8pPr marL="2571750" indent="-171450" algn="l" defTabSz="685800" rtl="0" eaLnBrk="1" latinLnBrk="0" hangingPunct="1">
+              <a:lnSpc>
+                <a:spcPct val="90000"/>
+              </a:lnSpc>
+              <a:spcBef>
+                <a:spcPts val="375"/>
+              </a:spcBef>
+              <a:buFont typeface="Arial" panose="020B0604020202020204" pitchFamily="34" charset="0"/>
+              <a:buChar char="•"/>
+              <a:defRPr sz="1350" kern="1200">
+                <a:solidFill>
+                  <a:schemeClr val="tx1"/>
+                </a:solidFill>
+                <a:latin typeface="+mn-lt"/>
+                <a:ea typeface="+mn-ea"/>
+                <a:cs typeface="+mn-cs"/>
+              </a:defRPr>
+            </a:lvl8pPr>
+            <a:lvl9pPr marL="2914650" indent="-171450" algn="l" defTabSz="685800" rtl="0" eaLnBrk="1" latinLnBrk="0" hangingPunct="1">
+              <a:lnSpc>
+                <a:spcPct val="90000"/>
+              </a:lnSpc>
+              <a:spcBef>
+                <a:spcPts val="375"/>
+              </a:spcBef>
+              <a:buFont typeface="Arial" panose="020B0604020202020204" pitchFamily="34" charset="0"/>
+              <a:buChar char="•"/>
+              <a:defRPr sz="1350" kern="1200">
+                <a:solidFill>
+                  <a:schemeClr val="tx1"/>
+                </a:solidFill>
+                <a:latin typeface="+mn-lt"/>
+                <a:ea typeface="+mn-ea"/>
+                <a:cs typeface="+mn-cs"/>
+              </a:defRPr>
+            </a:lvl9pPr>
+          </a:lstStyle>
+          <a:p>
+            <a:pPr marL="285750" indent="-285750">
+              <a:buFont typeface="Arial" panose="020B0604020202020204" pitchFamily="34" charset="0"/>
+              <a:buChar char="•"/>
+            </a:pPr>
+            <a:r>
+              <a:rPr lang="en-US" dirty="0"/>
+              <a:t>Implement MongoDB backend with current web application</a:t>
+            </a:r>
+          </a:p>
+          <a:p>
+            <a:pPr marL="628650" lvl="1" indent="-285750">
+              <a:buFont typeface="Arial" panose="020B0604020202020204" pitchFamily="34" charset="0"/>
+              <a:buChar char="•"/>
+            </a:pPr>
+            <a:r>
+              <a:rPr lang="en-US" dirty="0"/>
+              <a:t>No need for frontend, simplifies a lot of the work needed</a:t>
+            </a:r>
+          </a:p>
+          <a:p>
+            <a:pPr marL="285750" indent="-285750">
+              <a:buFont typeface="Arial" panose="020B0604020202020204" pitchFamily="34" charset="0"/>
+              <a:buChar char="•"/>
+            </a:pPr>
+            <a:r>
+              <a:rPr lang="en-US" dirty="0"/>
+              <a:t>Write documentation for operation of the device</a:t>
+            </a:r>
+          </a:p>
+          <a:p>
+            <a:pPr marL="628650" lvl="1" indent="-285750">
+              <a:buFont typeface="Arial" panose="020B0604020202020204" pitchFamily="34" charset="0"/>
+              <a:buChar char="•"/>
+            </a:pPr>
+            <a:r>
+              <a:rPr lang="en-US" dirty="0"/>
+              <a:t>Professor Karcher’s request for making sure the device is properly operated</a:t>
+            </a:r>
+          </a:p>
+          <a:p>
+            <a:pPr marL="628650" lvl="1" indent="-285750">
+              <a:buFont typeface="Arial" panose="020B0604020202020204" pitchFamily="34" charset="0"/>
+              <a:buChar char="•"/>
+            </a:pPr>
+            <a:r>
+              <a:rPr lang="en-US" dirty="0"/>
+              <a:t>Send a follow-up email to Professor Karcher for </a:t>
+            </a:r>
+            <a:r>
+              <a:rPr lang="en-US"/>
+              <a:t>a specific date to meet</a:t>
+            </a:r>
+            <a:endParaRPr lang="en-US" dirty="0"/>
+          </a:p>
+          <a:p>
+            <a:pPr marL="285750" indent="-285750">
+              <a:buFont typeface="Arial" panose="020B0604020202020204" pitchFamily="34" charset="0"/>
+              <a:buChar char="•"/>
+            </a:pPr>
+            <a:r>
+              <a:rPr lang="en-US" dirty="0"/>
+              <a:t>Showcase Agriculture department how to pull data from the database</a:t>
+            </a:r>
+          </a:p>
+          <a:p>
+            <a:pPr marL="628650" lvl="1" indent="-285750">
+              <a:buFont typeface="Arial" panose="020B0604020202020204" pitchFamily="34" charset="0"/>
+              <a:buChar char="•"/>
+            </a:pPr>
+            <a:r>
+              <a:rPr lang="en-US" dirty="0"/>
+              <a:t>Introduce MongoDB to Omosalewa and make sure the web application is as intuitive as possible</a:t>
+            </a:r>
+          </a:p>
+          <a:p>
+            <a:pPr marL="628650" lvl="1" indent="-285750">
+              <a:buFont typeface="Arial" panose="020B0604020202020204" pitchFamily="34" charset="0"/>
+              <a:buChar char="•"/>
+            </a:pPr>
+            <a:endParaRPr lang="en-US" dirty="0"/>
+          </a:p>
+        </p:txBody>
+      </p:sp>
+    </p:spTree>
+    <p:extLst>
+      <p:ext uri="{BB962C8B-B14F-4D97-AF65-F5344CB8AC3E}">
+        <p14:creationId xmlns:p14="http://schemas.microsoft.com/office/powerpoint/2010/main" val="1589025477"/>
+      </p:ext>
+    </p:extLst>
+  </p:cSld>
+  <p:clrMapOvr>
+    <a:masterClrMapping/>
+  </p:clrMapOvr>
+</p:sld>
+</file>
+
+<file path=ppt/slides/slide15.xml><?xml version="1.0" encoding="utf-8"?>
+<p:sld xmlns:a="http://schemas.openxmlformats.org/drawingml/2006/main" xmlns:r="http://schemas.openxmlformats.org/officeDocument/2006/relationships" xmlns:p="http://schemas.openxmlformats.org/presentationml/2006/main">
+  <p:cSld>
+    <p:spTree>
+      <p:nvGrpSpPr>
+        <p:cNvPr id="1" name=""/>
+        <p:cNvGrpSpPr/>
+        <p:nvPr/>
+      </p:nvGrpSpPr>
+      <p:grpSpPr>
+        <a:xfrm>
+          <a:off x="0" y="0"/>
+          <a:ext cx="0" cy="0"/>
+          <a:chOff x="0" y="0"/>
+          <a:chExt cx="0" cy="0"/>
+        </a:xfrm>
+      </p:grpSpPr>
+      <p:sp>
+        <p:nvSpPr>
+          <p:cNvPr id="2" name="Title 1">
+            <a:extLst>
+              <a:ext uri="{FF2B5EF4-FFF2-40B4-BE49-F238E27FC236}">
+                <a16:creationId xmlns:a16="http://schemas.microsoft.com/office/drawing/2014/main" id="{E4E72CBA-026F-7E96-546F-23B8813A83DA}"/>
+              </a:ext>
+            </a:extLst>
+          </p:cNvPr>
+          <p:cNvSpPr>
+            <a:spLocks noGrp="1"/>
+          </p:cNvSpPr>
+          <p:nvPr>
+            <p:ph type="title"/>
+          </p:nvPr>
+        </p:nvSpPr>
+        <p:spPr/>
+        <p:txBody>
+          <a:bodyPr/>
+          <a:lstStyle/>
+          <a:p>
+            <a:r>
+              <a:rPr lang="en-US" dirty="0"/>
+              <a:t>Thank You</a:t>
+            </a:r>
+          </a:p>
+        </p:txBody>
+      </p:sp>
+      <p:sp>
+        <p:nvSpPr>
+          <p:cNvPr id="3" name="Text Placeholder 2">
+            <a:extLst>
+              <a:ext uri="{FF2B5EF4-FFF2-40B4-BE49-F238E27FC236}">
+                <a16:creationId xmlns:a16="http://schemas.microsoft.com/office/drawing/2014/main" id="{CE8FBDCD-BC38-D4A8-A210-EA02F2610057}"/>
+              </a:ext>
+            </a:extLst>
+          </p:cNvPr>
+          <p:cNvSpPr>
+            <a:spLocks noGrp="1"/>
+          </p:cNvSpPr>
+          <p:nvPr>
+            <p:ph type="body" sz="quarter" idx="10"/>
+          </p:nvPr>
+        </p:nvSpPr>
+        <p:spPr/>
+        <p:txBody>
+          <a:bodyPr>
+            <a:normAutofit/>
+          </a:bodyPr>
+          <a:lstStyle/>
+          <a:p>
+            <a:r>
+              <a:rPr lang="en-US" dirty="0"/>
+              <a:t>Purdue Polytechnic Institute</a:t>
+            </a:r>
+          </a:p>
+        </p:txBody>
+      </p:sp>
+    </p:spTree>
+    <p:extLst>
+      <p:ext uri="{BB962C8B-B14F-4D97-AF65-F5344CB8AC3E}">
+        <p14:creationId xmlns:p14="http://schemas.microsoft.com/office/powerpoint/2010/main" val="3555266232"/>
       </p:ext>
     </p:extLst>
   </p:cSld>
@@ -13758,37 +15558,37 @@
             </a:pPr>
             <a:r>
               <a:rPr lang="en-US" dirty="0"/>
-              <a:t>PCB Updates</a:t>
-            </a:r>
-          </a:p>
-          <a:p>
-            <a:pPr marL="685800" lvl="1" indent="-342900">
+              <a:t>Data Collection Updates</a:t>
+            </a:r>
+          </a:p>
+          <a:p>
+            <a:pPr marL="628650" lvl="1" indent="-285750">
               <a:buFont typeface="Arial" panose="020B0604020202020204" pitchFamily="34" charset="0"/>
               <a:buChar char="•"/>
             </a:pPr>
             <a:r>
               <a:rPr lang="en-US" dirty="0"/>
-              <a:t>New symbol designed</a:t>
-            </a:r>
-          </a:p>
-          <a:p>
-            <a:pPr marL="685800" lvl="1" indent="-342900">
+              <a:t>New data logger frontend</a:t>
+            </a:r>
+          </a:p>
+          <a:p>
+            <a:pPr marL="628650" lvl="1" indent="-285750">
               <a:buFont typeface="Arial" panose="020B0604020202020204" pitchFamily="34" charset="0"/>
               <a:buChar char="•"/>
             </a:pPr>
             <a:r>
               <a:rPr lang="en-US" dirty="0"/>
-              <a:t>New footprint designed</a:t>
-            </a:r>
-          </a:p>
-          <a:p>
-            <a:pPr marL="685800" lvl="1" indent="-342900">
+              <a:t>Necessary firmware updates →  avoid overheating</a:t>
+            </a:r>
+          </a:p>
+          <a:p>
+            <a:pPr marL="628650" lvl="1" indent="-285750">
               <a:buFont typeface="Arial" panose="020B0604020202020204" pitchFamily="34" charset="0"/>
               <a:buChar char="•"/>
             </a:pPr>
             <a:r>
               <a:rPr lang="en-US" dirty="0"/>
-              <a:t>Power analysis done on P1110b</a:t>
+              <a:t>Corresponding backend updates</a:t>
             </a:r>
           </a:p>
           <a:p>
@@ -13798,7 +15598,7 @@
             </a:pPr>
             <a:r>
               <a:rPr lang="en-US" dirty="0"/>
-              <a:t>Summer Updates</a:t>
+              <a:t>PCB Updates</a:t>
             </a:r>
           </a:p>
           <a:p>
@@ -13808,7 +15608,55 @@
             </a:pPr>
             <a:r>
               <a:rPr lang="en-US" dirty="0"/>
-              <a:t>Summer Calendar submitted and signed</a:t>
+              <a:t>Fundamental circuit diagram completed</a:t>
+            </a:r>
+          </a:p>
+          <a:p>
+            <a:pPr marL="628650" lvl="1" indent="-285750">
+              <a:buFont typeface="Arial" panose="020B0604020202020204" pitchFamily="34" charset="0"/>
+              <a:buChar char="•"/>
+            </a:pPr>
+            <a:r>
+              <a:rPr lang="en-US" dirty="0"/>
+              <a:t>Updated </a:t>
+            </a:r>
+            <a:r>
+              <a:rPr lang="en-US" dirty="0" err="1"/>
+              <a:t>KiCAD</a:t>
+            </a:r>
+            <a:r>
+              <a:rPr lang="en-US" dirty="0"/>
+              <a:t> full circuit</a:t>
+            </a:r>
+          </a:p>
+          <a:p>
+            <a:pPr marL="628650" lvl="1" indent="-285750">
+              <a:buFont typeface="Arial" panose="020B0604020202020204" pitchFamily="34" charset="0"/>
+              <a:buChar char="•"/>
+            </a:pPr>
+            <a:r>
+              <a:rPr lang="en-US" dirty="0"/>
+              <a:t>Zoomed in RFID section</a:t>
+            </a:r>
+          </a:p>
+          <a:p>
+            <a:pPr marL="628650" lvl="1" indent="-285750">
+              <a:buFont typeface="Arial" panose="020B0604020202020204" pitchFamily="34" charset="0"/>
+              <a:buChar char="•"/>
+            </a:pPr>
+            <a:r>
+              <a:rPr lang="en-US" dirty="0"/>
+              <a:t>Finished PCB component for use on new PCB</a:t>
+            </a:r>
+          </a:p>
+          <a:p>
+            <a:pPr marL="628650" lvl="1" indent="-285750">
+              <a:buFont typeface="Arial" panose="020B0604020202020204" pitchFamily="34" charset="0"/>
+              <a:buChar char="•"/>
+            </a:pPr>
+            <a:r>
+              <a:rPr lang="en-US" dirty="0"/>
+              <a:t>PCB component added to design</a:t>
             </a:r>
           </a:p>
           <a:p>
@@ -13818,7 +15666,7 @@
             </a:pPr>
             <a:r>
               <a:rPr lang="en-US" dirty="0"/>
-              <a:t>Training Updates</a:t>
+              <a:t>Database Updates</a:t>
             </a:r>
           </a:p>
           <a:p>
@@ -13828,7 +15676,7 @@
             </a:pPr>
             <a:r>
               <a:rPr lang="en-US" dirty="0"/>
-              <a:t>Required Trainings Completed</a:t>
+              <a:t>MongoDB database collection method started</a:t>
             </a:r>
           </a:p>
           <a:p>
@@ -13930,7 +15778,7 @@
             <a:pPr algn="r"/>
             <a:r>
               <a:rPr lang="en-US" dirty="0"/>
-              <a:t>2/11</a:t>
+              <a:t>2/15</a:t>
             </a:r>
           </a:p>
         </p:txBody>
@@ -13970,7 +15818,7 @@
           <p:cNvPr id="2" name="Text Placeholder 1">
             <a:extLst>
               <a:ext uri="{FF2B5EF4-FFF2-40B4-BE49-F238E27FC236}">
-                <a16:creationId xmlns:a16="http://schemas.microsoft.com/office/drawing/2014/main" id="{51525BEF-8705-5EAE-832F-529E916BD3C4}"/>
+                <a16:creationId xmlns:a16="http://schemas.microsoft.com/office/drawing/2014/main" id="{C572022B-7E6B-6304-D81D-727A3AF8060C}"/>
               </a:ext>
             </a:extLst>
           </p:cNvPr>
@@ -13988,7 +15836,7 @@
           <a:p>
             <a:r>
               <a:rPr lang="en-US" dirty="0"/>
-              <a:t>New symbol designed</a:t>
+              <a:t>New data logger frontend</a:t>
             </a:r>
           </a:p>
         </p:txBody>
@@ -13998,7 +15846,7 @@
           <p:cNvPr id="3" name="Text Placeholder 2">
             <a:extLst>
               <a:ext uri="{FF2B5EF4-FFF2-40B4-BE49-F238E27FC236}">
-                <a16:creationId xmlns:a16="http://schemas.microsoft.com/office/drawing/2014/main" id="{CB67C5AD-CDCA-95FD-AF39-E126D3CAC0E8}"/>
+                <a16:creationId xmlns:a16="http://schemas.microsoft.com/office/drawing/2014/main" id="{59F7453B-45B4-ED6F-CCE3-097397C541F1}"/>
               </a:ext>
             </a:extLst>
           </p:cNvPr>
@@ -14020,7 +15868,7 @@
             </a:pPr>
             <a:r>
               <a:rPr lang="en-US" dirty="0"/>
-              <a:t>Designed to match P1110B</a:t>
+              <a:t>Sensors will operate on a dropdown system to save cache memory</a:t>
             </a:r>
           </a:p>
           <a:p>
@@ -14030,7 +15878,7 @@
             </a:pPr>
             <a:r>
               <a:rPr lang="en-US" dirty="0"/>
-              <a:t>Grounds need to be separate</a:t>
+              <a:t>3D viewer still present to get an idea of the current positioning of the system</a:t>
             </a:r>
           </a:p>
           <a:p>
@@ -14040,14 +15888,15 @@
             </a:pPr>
             <a:r>
               <a:rPr lang="en-US" dirty="0"/>
-              <a:t>Might cause interference</a:t>
-            </a:r>
-          </a:p>
-          <a:p>
-            <a:r>
-              <a:rPr lang="en-US" dirty="0"/>
-              <a:t> </a:t>
-            </a:r>
+              <a:t>Critical parts of new design stated below:</a:t>
+            </a:r>
+          </a:p>
+          <a:p>
+            <a:pPr marL="285750" indent="-285750">
+              <a:buFont typeface="Arial" panose="020B0604020202020204" pitchFamily="34" charset="0"/>
+              <a:buChar char="•"/>
+            </a:pPr>
+            <a:endParaRPr lang="en-US" dirty="0"/>
           </a:p>
         </p:txBody>
       </p:sp>
@@ -14056,7 +15905,7 @@
           <p:cNvPr id="4" name="Title 3">
             <a:extLst>
               <a:ext uri="{FF2B5EF4-FFF2-40B4-BE49-F238E27FC236}">
-                <a16:creationId xmlns:a16="http://schemas.microsoft.com/office/drawing/2014/main" id="{554E8E70-B190-3C76-2A2E-3EA3B87CAC8F}"/>
+                <a16:creationId xmlns:a16="http://schemas.microsoft.com/office/drawing/2014/main" id="{EDC0A7AF-7E83-6A99-4444-407FA52CD17A}"/>
               </a:ext>
             </a:extLst>
           </p:cNvPr>
@@ -14074,7 +15923,7 @@
           <a:p>
             <a:r>
               <a:rPr lang="en-US" dirty="0"/>
-              <a:t>PCB Updates</a:t>
+              <a:t>Data Collection Updates</a:t>
             </a:r>
           </a:p>
         </p:txBody>
@@ -14084,7 +15933,7 @@
           <p:cNvPr id="5" name="Footer Placeholder 4">
             <a:extLst>
               <a:ext uri="{FF2B5EF4-FFF2-40B4-BE49-F238E27FC236}">
-                <a16:creationId xmlns:a16="http://schemas.microsoft.com/office/drawing/2014/main" id="{E6FF2D39-572E-6541-A578-F9DC1914740D}"/>
+                <a16:creationId xmlns:a16="http://schemas.microsoft.com/office/drawing/2014/main" id="{324DFABA-DEED-6C13-2D2B-05B905BA8F4F}"/>
               </a:ext>
             </a:extLst>
           </p:cNvPr>
@@ -14102,19 +15951,18 @@
           <a:p>
             <a:pPr algn="r"/>
             <a:r>
-              <a:rPr lang="en-US"/>
-              <a:t>3/31/23            ‹#›</a:t>
-            </a:r>
-            <a:endParaRPr lang="en-US" dirty="0"/>
+              <a:rPr lang="en-US" dirty="0"/>
+              <a:t>3/15</a:t>
+            </a:r>
           </a:p>
         </p:txBody>
       </p:sp>
       <p:pic>
         <p:nvPicPr>
-          <p:cNvPr id="8" name="Picture 7">
-            <a:extLst>
-              <a:ext uri="{FF2B5EF4-FFF2-40B4-BE49-F238E27FC236}">
-                <a16:creationId xmlns:a16="http://schemas.microsoft.com/office/drawing/2014/main" id="{C522A4A5-5F47-AEB7-1F80-C63AE43556F2}"/>
+          <p:cNvPr id="10" name="Picture 9">
+            <a:extLst>
+              <a:ext uri="{FF2B5EF4-FFF2-40B4-BE49-F238E27FC236}">
+                <a16:creationId xmlns:a16="http://schemas.microsoft.com/office/drawing/2014/main" id="{248D885A-C9F2-C29F-010D-0A4ADC9B26AF}"/>
               </a:ext>
             </a:extLst>
           </p:cNvPr>
@@ -14131,18 +15979,312 @@
         </p:blipFill>
         <p:spPr>
           <a:xfrm>
-            <a:off x="3268998" y="2623280"/>
-            <a:ext cx="5132051" cy="3173442"/>
+            <a:off x="681717" y="2688219"/>
+            <a:ext cx="7772400" cy="3309811"/>
           </a:xfrm>
           <a:prstGeom prst="rect">
             <a:avLst/>
           </a:prstGeom>
         </p:spPr>
       </p:pic>
+      <p:sp>
+        <p:nvSpPr>
+          <p:cNvPr id="11" name="Oval 10">
+            <a:extLst>
+              <a:ext uri="{FF2B5EF4-FFF2-40B4-BE49-F238E27FC236}">
+                <a16:creationId xmlns:a16="http://schemas.microsoft.com/office/drawing/2014/main" id="{155A08FC-9F2E-48B9-79E4-EE3D55F5AF45}"/>
+              </a:ext>
+            </a:extLst>
+          </p:cNvPr>
+          <p:cNvSpPr/>
+          <p:nvPr/>
+        </p:nvSpPr>
+        <p:spPr>
+          <a:xfrm>
+            <a:off x="2697841" y="2633238"/>
+            <a:ext cx="1300061" cy="644577"/>
+          </a:xfrm>
+          <a:prstGeom prst="ellipse">
+            <a:avLst/>
+          </a:prstGeom>
+          <a:noFill/>
+          <a:ln w="38100">
+            <a:solidFill>
+              <a:srgbClr val="FF0000"/>
+            </a:solidFill>
+          </a:ln>
+        </p:spPr>
+        <p:style>
+          <a:lnRef idx="2">
+            <a:schemeClr val="dk1">
+              <a:shade val="50000"/>
+            </a:schemeClr>
+          </a:lnRef>
+          <a:fillRef idx="1">
+            <a:schemeClr val="dk1"/>
+          </a:fillRef>
+          <a:effectRef idx="0">
+            <a:schemeClr val="dk1"/>
+          </a:effectRef>
+          <a:fontRef idx="minor">
+            <a:schemeClr val="lt1"/>
+          </a:fontRef>
+        </p:style>
+        <p:txBody>
+          <a:bodyPr rtlCol="0" anchor="ctr"/>
+          <a:lstStyle/>
+          <a:p>
+            <a:pPr algn="ctr"/>
+            <a:endParaRPr lang="en-US">
+              <a:ln>
+                <a:solidFill>
+                  <a:srgbClr val="FF0000"/>
+                </a:solidFill>
+              </a:ln>
+              <a:noFill/>
+            </a:endParaRPr>
+          </a:p>
+        </p:txBody>
+      </p:sp>
+      <p:sp>
+        <p:nvSpPr>
+          <p:cNvPr id="12" name="Oval 11">
+            <a:extLst>
+              <a:ext uri="{FF2B5EF4-FFF2-40B4-BE49-F238E27FC236}">
+                <a16:creationId xmlns:a16="http://schemas.microsoft.com/office/drawing/2014/main" id="{A64D38CD-6EE4-F806-BAED-309256234648}"/>
+              </a:ext>
+            </a:extLst>
+          </p:cNvPr>
+          <p:cNvSpPr/>
+          <p:nvPr/>
+        </p:nvSpPr>
+        <p:spPr>
+          <a:xfrm>
+            <a:off x="4713965" y="2705691"/>
+            <a:ext cx="1924341" cy="1070662"/>
+          </a:xfrm>
+          <a:prstGeom prst="ellipse">
+            <a:avLst/>
+          </a:prstGeom>
+          <a:noFill/>
+          <a:ln w="38100">
+            <a:solidFill>
+              <a:srgbClr val="FF0000"/>
+            </a:solidFill>
+          </a:ln>
+        </p:spPr>
+        <p:style>
+          <a:lnRef idx="2">
+            <a:schemeClr val="dk1">
+              <a:shade val="50000"/>
+            </a:schemeClr>
+          </a:lnRef>
+          <a:fillRef idx="1">
+            <a:schemeClr val="dk1"/>
+          </a:fillRef>
+          <a:effectRef idx="0">
+            <a:schemeClr val="dk1"/>
+          </a:effectRef>
+          <a:fontRef idx="minor">
+            <a:schemeClr val="lt1"/>
+          </a:fontRef>
+        </p:style>
+        <p:txBody>
+          <a:bodyPr rtlCol="0" anchor="ctr"/>
+          <a:lstStyle/>
+          <a:p>
+            <a:pPr algn="ctr"/>
+            <a:endParaRPr lang="en-US">
+              <a:ln>
+                <a:solidFill>
+                  <a:srgbClr val="FF0000"/>
+                </a:solidFill>
+              </a:ln>
+              <a:noFill/>
+            </a:endParaRPr>
+          </a:p>
+        </p:txBody>
+      </p:sp>
+      <p:sp>
+        <p:nvSpPr>
+          <p:cNvPr id="13" name="TextBox 12">
+            <a:extLst>
+              <a:ext uri="{FF2B5EF4-FFF2-40B4-BE49-F238E27FC236}">
+                <a16:creationId xmlns:a16="http://schemas.microsoft.com/office/drawing/2014/main" id="{A358557E-ABAC-ACCC-95C9-E817359C9E36}"/>
+              </a:ext>
+            </a:extLst>
+          </p:cNvPr>
+          <p:cNvSpPr txBox="1"/>
+          <p:nvPr/>
+        </p:nvSpPr>
+        <p:spPr>
+          <a:xfrm>
+            <a:off x="5298125" y="4668345"/>
+            <a:ext cx="2680362" cy="646331"/>
+          </a:xfrm>
+          <a:prstGeom prst="rect">
+            <a:avLst/>
+          </a:prstGeom>
+          <a:noFill/>
+          <a:ln>
+            <a:solidFill>
+              <a:srgbClr val="FF0000"/>
+            </a:solidFill>
+          </a:ln>
+        </p:spPr>
+        <p:txBody>
+          <a:bodyPr wrap="square" rtlCol="0">
+            <a:spAutoFit/>
+          </a:bodyPr>
+          <a:lstStyle/>
+          <a:p>
+            <a:r>
+              <a:rPr lang="en-US" dirty="0">
+                <a:solidFill>
+                  <a:schemeClr val="bg1"/>
+                </a:solidFill>
+              </a:rPr>
+              <a:t>Dropdown menu for sensor and sample rate</a:t>
+            </a:r>
+          </a:p>
+        </p:txBody>
+      </p:sp>
+      <p:cxnSp>
+        <p:nvCxnSpPr>
+          <p:cNvPr id="14" name="Straight Arrow Connector 13">
+            <a:extLst>
+              <a:ext uri="{FF2B5EF4-FFF2-40B4-BE49-F238E27FC236}">
+                <a16:creationId xmlns:a16="http://schemas.microsoft.com/office/drawing/2014/main" id="{14897BF3-D65B-076C-ECBF-4F20CA062393}"/>
+              </a:ext>
+            </a:extLst>
+          </p:cNvPr>
+          <p:cNvCxnSpPr>
+            <a:cxnSpLocks/>
+          </p:cNvCxnSpPr>
+          <p:nvPr/>
+        </p:nvCxnSpPr>
+        <p:spPr>
+          <a:xfrm flipH="1" flipV="1">
+            <a:off x="5961413" y="3815866"/>
+            <a:ext cx="473068" cy="824989"/>
+          </a:xfrm>
+          <a:prstGeom prst="straightConnector1">
+            <a:avLst/>
+          </a:prstGeom>
+          <a:ln>
+            <a:solidFill>
+              <a:srgbClr val="FF0000"/>
+            </a:solidFill>
+            <a:tailEnd type="triangle"/>
+          </a:ln>
+        </p:spPr>
+        <p:style>
+          <a:lnRef idx="1">
+            <a:schemeClr val="accent1"/>
+          </a:lnRef>
+          <a:fillRef idx="0">
+            <a:schemeClr val="accent1"/>
+          </a:fillRef>
+          <a:effectRef idx="0">
+            <a:schemeClr val="accent1"/>
+          </a:effectRef>
+          <a:fontRef idx="minor">
+            <a:schemeClr val="tx1"/>
+          </a:fontRef>
+        </p:style>
+      </p:cxnSp>
+      <p:sp>
+        <p:nvSpPr>
+          <p:cNvPr id="16" name="TextBox 15">
+            <a:extLst>
+              <a:ext uri="{FF2B5EF4-FFF2-40B4-BE49-F238E27FC236}">
+                <a16:creationId xmlns:a16="http://schemas.microsoft.com/office/drawing/2014/main" id="{0F0245BF-567E-F071-994F-5773A1EF0C8F}"/>
+              </a:ext>
+            </a:extLst>
+          </p:cNvPr>
+          <p:cNvSpPr txBox="1"/>
+          <p:nvPr/>
+        </p:nvSpPr>
+        <p:spPr>
+          <a:xfrm>
+            <a:off x="795397" y="5534377"/>
+            <a:ext cx="3075959" cy="369332"/>
+          </a:xfrm>
+          <a:prstGeom prst="rect">
+            <a:avLst/>
+          </a:prstGeom>
+          <a:noFill/>
+          <a:ln>
+            <a:solidFill>
+              <a:srgbClr val="FF0000"/>
+            </a:solidFill>
+          </a:ln>
+        </p:spPr>
+        <p:txBody>
+          <a:bodyPr wrap="square" rtlCol="0">
+            <a:spAutoFit/>
+          </a:bodyPr>
+          <a:lstStyle/>
+          <a:p>
+            <a:r>
+              <a:rPr lang="en-US" dirty="0">
+                <a:solidFill>
+                  <a:schemeClr val="bg1"/>
+                </a:solidFill>
+              </a:rPr>
+              <a:t>Only last 60 seconds present</a:t>
+            </a:r>
+          </a:p>
+        </p:txBody>
+      </p:sp>
+      <p:cxnSp>
+        <p:nvCxnSpPr>
+          <p:cNvPr id="17" name="Straight Arrow Connector 16">
+            <a:extLst>
+              <a:ext uri="{FF2B5EF4-FFF2-40B4-BE49-F238E27FC236}">
+                <a16:creationId xmlns:a16="http://schemas.microsoft.com/office/drawing/2014/main" id="{FCE9EB48-4A61-241D-8A28-3BEF8BABE1D1}"/>
+              </a:ext>
+            </a:extLst>
+          </p:cNvPr>
+          <p:cNvCxnSpPr>
+            <a:cxnSpLocks/>
+          </p:cNvCxnSpPr>
+          <p:nvPr/>
+        </p:nvCxnSpPr>
+        <p:spPr>
+          <a:xfrm flipV="1">
+            <a:off x="3871356" y="5639729"/>
+            <a:ext cx="1650670" cy="94321"/>
+          </a:xfrm>
+          <a:prstGeom prst="straightConnector1">
+            <a:avLst/>
+          </a:prstGeom>
+          <a:ln>
+            <a:solidFill>
+              <a:srgbClr val="FF0000"/>
+            </a:solidFill>
+            <a:tailEnd type="triangle"/>
+          </a:ln>
+        </p:spPr>
+        <p:style>
+          <a:lnRef idx="1">
+            <a:schemeClr val="accent1"/>
+          </a:lnRef>
+          <a:fillRef idx="0">
+            <a:schemeClr val="accent1"/>
+          </a:fillRef>
+          <a:effectRef idx="0">
+            <a:schemeClr val="accent1"/>
+          </a:effectRef>
+          <a:fontRef idx="minor">
+            <a:schemeClr val="tx1"/>
+          </a:fontRef>
+        </p:style>
+      </p:cxnSp>
     </p:spTree>
     <p:extLst>
       <p:ext uri="{BB962C8B-B14F-4D97-AF65-F5344CB8AC3E}">
-        <p14:creationId xmlns:p14="http://schemas.microsoft.com/office/powerpoint/2010/main" val="801393480"/>
+        <p14:creationId xmlns:p14="http://schemas.microsoft.com/office/powerpoint/2010/main" val="266355120"/>
       </p:ext>
     </p:extLst>
   </p:cSld>
@@ -14160,7 +16302,7 @@
         <p:cNvPr id="1" name="">
           <a:extLst>
             <a:ext uri="{FF2B5EF4-FFF2-40B4-BE49-F238E27FC236}">
-              <a16:creationId xmlns:a16="http://schemas.microsoft.com/office/drawing/2014/main" id="{1A3FF5E6-12DA-2B2B-A71F-4C6E1DBABF43}"/>
+              <a16:creationId xmlns:a16="http://schemas.microsoft.com/office/drawing/2014/main" id="{628DC34E-A141-0C4C-91B0-7FF2A30A3661}"/>
             </a:ext>
           </a:extLst>
         </p:cNvPr>
@@ -14180,7 +16322,7 @@
           <p:cNvPr id="2" name="Text Placeholder 1">
             <a:extLst>
               <a:ext uri="{FF2B5EF4-FFF2-40B4-BE49-F238E27FC236}">
-                <a16:creationId xmlns:a16="http://schemas.microsoft.com/office/drawing/2014/main" id="{9EC89B8B-9C0D-6D55-E74D-251C82755BE2}"/>
+                <a16:creationId xmlns:a16="http://schemas.microsoft.com/office/drawing/2014/main" id="{EFA70903-656C-4C7E-302E-A8605559C7F3}"/>
               </a:ext>
             </a:extLst>
           </p:cNvPr>
@@ -14198,7 +16340,7 @@
           <a:p>
             <a:r>
               <a:rPr lang="en-US" dirty="0"/>
-              <a:t>New footprint designed</a:t>
+              <a:t>Necessary firmware updates →  avoid overheating</a:t>
             </a:r>
           </a:p>
         </p:txBody>
@@ -14208,7 +16350,7 @@
           <p:cNvPr id="3" name="Text Placeholder 2">
             <a:extLst>
               <a:ext uri="{FF2B5EF4-FFF2-40B4-BE49-F238E27FC236}">
-                <a16:creationId xmlns:a16="http://schemas.microsoft.com/office/drawing/2014/main" id="{E3405D0A-E861-A612-6E75-9384326D145E}"/>
+                <a16:creationId xmlns:a16="http://schemas.microsoft.com/office/drawing/2014/main" id="{724CA065-E52C-40EF-82B9-D8B495B43B30}"/>
               </a:ext>
             </a:extLst>
           </p:cNvPr>
@@ -14230,7 +16372,7 @@
             </a:pPr>
             <a:r>
               <a:rPr lang="en-US" dirty="0"/>
-              <a:t>Designed to match P1110B</a:t>
+              <a:t>Unnecessary Sensors have been deactivated</a:t>
             </a:r>
           </a:p>
           <a:p>
@@ -14240,8 +16382,11 @@
             </a:pPr>
             <a:r>
               <a:rPr lang="en-US" dirty="0"/>
-              <a:t>Powercast device will need to be elevated on board because it is an external product </a:t>
-            </a:r>
+              <a:t>Firmware NEEDS to be flashed every time a new software update is available:</a:t>
+            </a:r>
+          </a:p>
+          <a:p>
+            <a:endParaRPr lang="en-US" dirty="0"/>
           </a:p>
         </p:txBody>
       </p:sp>
@@ -14250,7 +16395,7 @@
           <p:cNvPr id="4" name="Title 3">
             <a:extLst>
               <a:ext uri="{FF2B5EF4-FFF2-40B4-BE49-F238E27FC236}">
-                <a16:creationId xmlns:a16="http://schemas.microsoft.com/office/drawing/2014/main" id="{92106257-2C01-21D7-141E-589A821CA3BF}"/>
+                <a16:creationId xmlns:a16="http://schemas.microsoft.com/office/drawing/2014/main" id="{A0599BE6-FB36-3EB8-812F-0B023F39DDC5}"/>
               </a:ext>
             </a:extLst>
           </p:cNvPr>
@@ -14268,7 +16413,7 @@
           <a:p>
             <a:r>
               <a:rPr lang="en-US" dirty="0"/>
-              <a:t>PCB Updates</a:t>
+              <a:t>Data Collection Updates</a:t>
             </a:r>
           </a:p>
         </p:txBody>
@@ -14278,7 +16423,7 @@
           <p:cNvPr id="5" name="Footer Placeholder 4">
             <a:extLst>
               <a:ext uri="{FF2B5EF4-FFF2-40B4-BE49-F238E27FC236}">
-                <a16:creationId xmlns:a16="http://schemas.microsoft.com/office/drawing/2014/main" id="{B0B94203-7021-CD8B-F41A-28BFC0285B96}"/>
+                <a16:creationId xmlns:a16="http://schemas.microsoft.com/office/drawing/2014/main" id="{E651868C-A786-CEB2-E65B-E713466D9836}"/>
               </a:ext>
             </a:extLst>
           </p:cNvPr>
@@ -14296,19 +16441,18 @@
           <a:p>
             <a:pPr algn="r"/>
             <a:r>
-              <a:rPr lang="en-US"/>
-              <a:t>3/31/23            ‹#›</a:t>
-            </a:r>
-            <a:endParaRPr lang="en-US" dirty="0"/>
+              <a:rPr lang="en-US" dirty="0"/>
+              <a:t>4/15</a:t>
+            </a:r>
           </a:p>
         </p:txBody>
       </p:sp>
       <p:pic>
         <p:nvPicPr>
-          <p:cNvPr id="7" name="Picture 6">
-            <a:extLst>
-              <a:ext uri="{FF2B5EF4-FFF2-40B4-BE49-F238E27FC236}">
-                <a16:creationId xmlns:a16="http://schemas.microsoft.com/office/drawing/2014/main" id="{2FB05CBF-2636-F231-EF8C-6B0C06315BB6}"/>
+          <p:cNvPr id="8" name="Picture 7">
+            <a:extLst>
+              <a:ext uri="{FF2B5EF4-FFF2-40B4-BE49-F238E27FC236}">
+                <a16:creationId xmlns:a16="http://schemas.microsoft.com/office/drawing/2014/main" id="{3D3C6AF0-ACD8-E84C-B3F3-DF707841E75D}"/>
               </a:ext>
             </a:extLst>
           </p:cNvPr>
@@ -14325,18 +16469,303 @@
         </p:blipFill>
         <p:spPr>
           <a:xfrm>
-            <a:off x="3957402" y="2939404"/>
-            <a:ext cx="4265847" cy="3398217"/>
+            <a:off x="2848133" y="2317497"/>
+            <a:ext cx="5175286" cy="3903806"/>
           </a:xfrm>
           <a:prstGeom prst="rect">
             <a:avLst/>
           </a:prstGeom>
         </p:spPr>
       </p:pic>
+      <p:sp>
+        <p:nvSpPr>
+          <p:cNvPr id="9" name="Oval 8">
+            <a:extLst>
+              <a:ext uri="{FF2B5EF4-FFF2-40B4-BE49-F238E27FC236}">
+                <a16:creationId xmlns:a16="http://schemas.microsoft.com/office/drawing/2014/main" id="{F66541B3-386B-0E91-735B-5C038A7DEBB4}"/>
+              </a:ext>
+            </a:extLst>
+          </p:cNvPr>
+          <p:cNvSpPr/>
+          <p:nvPr/>
+        </p:nvSpPr>
+        <p:spPr>
+          <a:xfrm>
+            <a:off x="3149103" y="2155409"/>
+            <a:ext cx="1300061" cy="644577"/>
+          </a:xfrm>
+          <a:prstGeom prst="ellipse">
+            <a:avLst/>
+          </a:prstGeom>
+          <a:noFill/>
+          <a:ln w="38100">
+            <a:solidFill>
+              <a:srgbClr val="FF0000"/>
+            </a:solidFill>
+          </a:ln>
+        </p:spPr>
+        <p:style>
+          <a:lnRef idx="2">
+            <a:schemeClr val="dk1">
+              <a:shade val="50000"/>
+            </a:schemeClr>
+          </a:lnRef>
+          <a:fillRef idx="1">
+            <a:schemeClr val="dk1"/>
+          </a:fillRef>
+          <a:effectRef idx="0">
+            <a:schemeClr val="dk1"/>
+          </a:effectRef>
+          <a:fontRef idx="minor">
+            <a:schemeClr val="lt1"/>
+          </a:fontRef>
+        </p:style>
+        <p:txBody>
+          <a:bodyPr rtlCol="0" anchor="ctr"/>
+          <a:lstStyle/>
+          <a:p>
+            <a:pPr algn="ctr"/>
+            <a:endParaRPr lang="en-US">
+              <a:ln>
+                <a:solidFill>
+                  <a:srgbClr val="FF0000"/>
+                </a:solidFill>
+              </a:ln>
+              <a:noFill/>
+            </a:endParaRPr>
+          </a:p>
+        </p:txBody>
+      </p:sp>
+      <p:sp>
+        <p:nvSpPr>
+          <p:cNvPr id="10" name="TextBox 9">
+            <a:extLst>
+              <a:ext uri="{FF2B5EF4-FFF2-40B4-BE49-F238E27FC236}">
+                <a16:creationId xmlns:a16="http://schemas.microsoft.com/office/drawing/2014/main" id="{074FB08E-0A4F-A2D1-A9A6-C77B2B6C290A}"/>
+              </a:ext>
+            </a:extLst>
+          </p:cNvPr>
+          <p:cNvSpPr txBox="1"/>
+          <p:nvPr/>
+        </p:nvSpPr>
+        <p:spPr>
+          <a:xfrm>
+            <a:off x="342900" y="2838058"/>
+            <a:ext cx="2329048" cy="646331"/>
+          </a:xfrm>
+          <a:prstGeom prst="rect">
+            <a:avLst/>
+          </a:prstGeom>
+          <a:noFill/>
+          <a:ln>
+            <a:solidFill>
+              <a:srgbClr val="FF0000"/>
+            </a:solidFill>
+          </a:ln>
+        </p:spPr>
+        <p:txBody>
+          <a:bodyPr wrap="square" rtlCol="0">
+            <a:spAutoFit/>
+          </a:bodyPr>
+          <a:lstStyle/>
+          <a:p>
+            <a:r>
+              <a:rPr lang="en-US" dirty="0"/>
+              <a:t>Ensure the correct device is selected </a:t>
+            </a:r>
+          </a:p>
+        </p:txBody>
+      </p:sp>
+      <p:cxnSp>
+        <p:nvCxnSpPr>
+          <p:cNvPr id="12" name="Straight Arrow Connector 11">
+            <a:extLst>
+              <a:ext uri="{FF2B5EF4-FFF2-40B4-BE49-F238E27FC236}">
+                <a16:creationId xmlns:a16="http://schemas.microsoft.com/office/drawing/2014/main" id="{21EEB908-DB68-3855-1681-29B08C1DEDB0}"/>
+              </a:ext>
+            </a:extLst>
+          </p:cNvPr>
+          <p:cNvCxnSpPr/>
+          <p:nvPr/>
+        </p:nvCxnSpPr>
+        <p:spPr>
+          <a:xfrm flipV="1">
+            <a:off x="2670003" y="2620056"/>
+            <a:ext cx="595908" cy="218002"/>
+          </a:xfrm>
+          <a:prstGeom prst="straightConnector1">
+            <a:avLst/>
+          </a:prstGeom>
+          <a:ln>
+            <a:solidFill>
+              <a:srgbClr val="FF0000"/>
+            </a:solidFill>
+            <a:tailEnd type="triangle"/>
+          </a:ln>
+        </p:spPr>
+        <p:style>
+          <a:lnRef idx="1">
+            <a:schemeClr val="accent1"/>
+          </a:lnRef>
+          <a:fillRef idx="0">
+            <a:schemeClr val="accent1"/>
+          </a:fillRef>
+          <a:effectRef idx="0">
+            <a:schemeClr val="accent1"/>
+          </a:effectRef>
+          <a:fontRef idx="minor">
+            <a:schemeClr val="tx1"/>
+          </a:fontRef>
+        </p:style>
+      </p:cxnSp>
+      <p:sp>
+        <p:nvSpPr>
+          <p:cNvPr id="13" name="Oval 12">
+            <a:extLst>
+              <a:ext uri="{FF2B5EF4-FFF2-40B4-BE49-F238E27FC236}">
+                <a16:creationId xmlns:a16="http://schemas.microsoft.com/office/drawing/2014/main" id="{A99481CE-B52B-9190-6865-4FFE9A0F2411}"/>
+              </a:ext>
+            </a:extLst>
+          </p:cNvPr>
+          <p:cNvSpPr/>
+          <p:nvPr/>
+        </p:nvSpPr>
+        <p:spPr>
+          <a:xfrm>
+            <a:off x="2848133" y="5675368"/>
+            <a:ext cx="1300061" cy="644577"/>
+          </a:xfrm>
+          <a:prstGeom prst="ellipse">
+            <a:avLst/>
+          </a:prstGeom>
+          <a:noFill/>
+          <a:ln w="38100">
+            <a:solidFill>
+              <a:srgbClr val="FF0000"/>
+            </a:solidFill>
+          </a:ln>
+        </p:spPr>
+        <p:style>
+          <a:lnRef idx="2">
+            <a:schemeClr val="dk1">
+              <a:shade val="50000"/>
+            </a:schemeClr>
+          </a:lnRef>
+          <a:fillRef idx="1">
+            <a:schemeClr val="dk1"/>
+          </a:fillRef>
+          <a:effectRef idx="0">
+            <a:schemeClr val="dk1"/>
+          </a:effectRef>
+          <a:fontRef idx="minor">
+            <a:schemeClr val="lt1"/>
+          </a:fontRef>
+        </p:style>
+        <p:txBody>
+          <a:bodyPr rtlCol="0" anchor="ctr"/>
+          <a:lstStyle/>
+          <a:p>
+            <a:pPr algn="ctr"/>
+            <a:endParaRPr lang="en-US">
+              <a:ln>
+                <a:solidFill>
+                  <a:srgbClr val="FF0000"/>
+                </a:solidFill>
+              </a:ln>
+              <a:noFill/>
+            </a:endParaRPr>
+          </a:p>
+        </p:txBody>
+      </p:sp>
+      <p:sp>
+        <p:nvSpPr>
+          <p:cNvPr id="14" name="TextBox 13">
+            <a:extLst>
+              <a:ext uri="{FF2B5EF4-FFF2-40B4-BE49-F238E27FC236}">
+                <a16:creationId xmlns:a16="http://schemas.microsoft.com/office/drawing/2014/main" id="{67E95A71-CD74-B405-00C7-38D874540589}"/>
+              </a:ext>
+            </a:extLst>
+          </p:cNvPr>
+          <p:cNvSpPr txBox="1"/>
+          <p:nvPr/>
+        </p:nvSpPr>
+        <p:spPr>
+          <a:xfrm>
+            <a:off x="234043" y="5074326"/>
+            <a:ext cx="2329048" cy="923330"/>
+          </a:xfrm>
+          <a:prstGeom prst="rect">
+            <a:avLst/>
+          </a:prstGeom>
+          <a:noFill/>
+          <a:ln>
+            <a:solidFill>
+              <a:srgbClr val="FF0000"/>
+            </a:solidFill>
+          </a:ln>
+        </p:spPr>
+        <p:txBody>
+          <a:bodyPr wrap="square" rtlCol="0">
+            <a:spAutoFit/>
+          </a:bodyPr>
+          <a:lstStyle/>
+          <a:p>
+            <a:r>
+              <a:rPr lang="en-US" dirty="0"/>
+              <a:t>Correct shutdown message will be stated</a:t>
+            </a:r>
+          </a:p>
+        </p:txBody>
+      </p:sp>
+      <p:cxnSp>
+        <p:nvCxnSpPr>
+          <p:cNvPr id="16" name="Straight Arrow Connector 15">
+            <a:extLst>
+              <a:ext uri="{FF2B5EF4-FFF2-40B4-BE49-F238E27FC236}">
+                <a16:creationId xmlns:a16="http://schemas.microsoft.com/office/drawing/2014/main" id="{BFCF3D05-B845-4BCC-7D46-36A00CC1772F}"/>
+              </a:ext>
+            </a:extLst>
+          </p:cNvPr>
+          <p:cNvCxnSpPr>
+            <a:cxnSpLocks/>
+            <a:endCxn id="13" idx="1"/>
+          </p:cNvCxnSpPr>
+          <p:nvPr/>
+        </p:nvCxnSpPr>
+        <p:spPr>
+          <a:xfrm>
+            <a:off x="2550179" y="5561096"/>
+            <a:ext cx="488344" cy="208668"/>
+          </a:xfrm>
+          <a:prstGeom prst="straightConnector1">
+            <a:avLst/>
+          </a:prstGeom>
+          <a:ln>
+            <a:solidFill>
+              <a:srgbClr val="FF0000"/>
+            </a:solidFill>
+            <a:tailEnd type="triangle"/>
+          </a:ln>
+        </p:spPr>
+        <p:style>
+          <a:lnRef idx="1">
+            <a:schemeClr val="accent1"/>
+          </a:lnRef>
+          <a:fillRef idx="0">
+            <a:schemeClr val="accent1"/>
+          </a:fillRef>
+          <a:effectRef idx="0">
+            <a:schemeClr val="accent1"/>
+          </a:effectRef>
+          <a:fontRef idx="minor">
+            <a:schemeClr val="tx1"/>
+          </a:fontRef>
+        </p:style>
+      </p:cxnSp>
     </p:spTree>
     <p:extLst>
       <p:ext uri="{BB962C8B-B14F-4D97-AF65-F5344CB8AC3E}">
-        <p14:creationId xmlns:p14="http://schemas.microsoft.com/office/powerpoint/2010/main" val="2897858643"/>
+        <p14:creationId xmlns:p14="http://schemas.microsoft.com/office/powerpoint/2010/main" val="3564242904"/>
       </p:ext>
     </p:extLst>
   </p:cSld>
@@ -14351,13 +16780,7 @@
   <p:cSld>
     <p:spTree>
       <p:nvGrpSpPr>
-        <p:cNvPr id="1" name="">
-          <a:extLst>
-            <a:ext uri="{FF2B5EF4-FFF2-40B4-BE49-F238E27FC236}">
-              <a16:creationId xmlns:a16="http://schemas.microsoft.com/office/drawing/2014/main" id="{04284FE0-B695-4D26-8A20-A1D89E093383}"/>
-            </a:ext>
-          </a:extLst>
-        </p:cNvPr>
+        <p:cNvPr id="1" name=""/>
         <p:cNvGrpSpPr/>
         <p:nvPr/>
       </p:nvGrpSpPr>
@@ -14374,7 +16797,7 @@
           <p:cNvPr id="2" name="Text Placeholder 1">
             <a:extLst>
               <a:ext uri="{FF2B5EF4-FFF2-40B4-BE49-F238E27FC236}">
-                <a16:creationId xmlns:a16="http://schemas.microsoft.com/office/drawing/2014/main" id="{A67BCF0B-03DF-7AFC-CB8A-BB630443C865}"/>
+                <a16:creationId xmlns:a16="http://schemas.microsoft.com/office/drawing/2014/main" id="{E0E8E513-9788-8ECB-7C15-E7EA0658571B}"/>
               </a:ext>
             </a:extLst>
           </p:cNvPr>
@@ -14392,7 +16815,7 @@
           <a:p>
             <a:r>
               <a:rPr lang="en-US" dirty="0"/>
-              <a:t>Power analysis</a:t>
+              <a:t>Corresponding backend updates</a:t>
             </a:r>
           </a:p>
         </p:txBody>
@@ -14402,7 +16825,7 @@
           <p:cNvPr id="3" name="Text Placeholder 2">
             <a:extLst>
               <a:ext uri="{FF2B5EF4-FFF2-40B4-BE49-F238E27FC236}">
-                <a16:creationId xmlns:a16="http://schemas.microsoft.com/office/drawing/2014/main" id="{F693CCFC-072F-D579-D82A-F2BE806734FB}"/>
+                <a16:creationId xmlns:a16="http://schemas.microsoft.com/office/drawing/2014/main" id="{76F6B465-71C4-11A7-2C69-A1E6B8BDFC95}"/>
               </a:ext>
             </a:extLst>
           </p:cNvPr>
@@ -14413,149 +16836,67 @@
             <p:ph type="body" sz="quarter" idx="10"/>
           </p:nvPr>
         </p:nvSpPr>
-        <p:spPr>
-          <a:xfrm>
-            <a:off x="184731" y="1494337"/>
-            <a:ext cx="8450035" cy="4454706"/>
-          </a:xfrm>
-        </p:spPr>
+        <p:spPr/>
         <p:txBody>
           <a:bodyPr/>
           <a:lstStyle/>
           <a:p>
-            <a:pPr marL="285750" lvl="0" indent="-285750" defTabSz="914400" eaLnBrk="0" fontAlgn="base" hangingPunct="0">
-              <a:lnSpc>
-                <a:spcPct val="100000"/>
-              </a:lnSpc>
-              <a:spcBef>
-                <a:spcPct val="0"/>
-              </a:spcBef>
-              <a:spcAft>
-                <a:spcPct val="0"/>
-              </a:spcAft>
+            <a:pPr marL="342900" indent="-342900">
               <a:buFont typeface="Arial" panose="020B0604020202020204" pitchFamily="34" charset="0"/>
               <a:buChar char="•"/>
             </a:pPr>
             <a:r>
-              <a:rPr lang="en-US" altLang="en-US" dirty="0">
-                <a:solidFill>
-                  <a:srgbClr val="000000"/>
-                </a:solidFill>
-                <a:latin typeface="Arial" panose="020B0604020202020204" pitchFamily="34" charset="0"/>
+              <a:rPr lang="en-US" dirty="0"/>
+              <a:t>Backend again </a:t>
+            </a:r>
+            <a:r>
+              <a:rPr lang="en-US" dirty="0">
+                <a:hlinkClick r:id="rId2"/>
               </a:rPr>
-              <a:t>Peak Output Power: 210 </a:t>
-            </a:r>
-            <a:r>
-              <a:rPr lang="en-US" altLang="en-US" dirty="0" err="1">
-                <a:solidFill>
-                  <a:srgbClr val="000000"/>
-                </a:solidFill>
-                <a:latin typeface="Arial" panose="020B0604020202020204" pitchFamily="34" charset="0"/>
+              <a:t>hosted</a:t>
+            </a:r>
+            <a:r>
+              <a:rPr lang="en-US" dirty="0"/>
+              <a:t> at: </a:t>
+            </a:r>
+            <a:r>
+              <a:rPr lang="en-US" dirty="0">
+                <a:hlinkClick r:id="rId2"/>
               </a:rPr>
-              <a:t>mW</a:t>
-            </a:r>
-            <a:r>
-              <a:rPr lang="en-US" altLang="en-US" dirty="0">
-                <a:solidFill>
-                  <a:srgbClr val="000000"/>
-                </a:solidFill>
-                <a:latin typeface="Arial" panose="020B0604020202020204" pitchFamily="34" charset="0"/>
-              </a:rPr>
-              <a:t> (0.21 Watts) at maximum RF input.</a:t>
-            </a:r>
-          </a:p>
-          <a:p>
-            <a:pPr marL="285750" lvl="0" indent="-285750" defTabSz="914400" eaLnBrk="0" fontAlgn="base" hangingPunct="0">
-              <a:lnSpc>
-                <a:spcPct val="100000"/>
-              </a:lnSpc>
-              <a:spcBef>
-                <a:spcPct val="0"/>
-              </a:spcBef>
-              <a:spcAft>
-                <a:spcPct val="0"/>
-              </a:spcAft>
+              <a:t>https://nhuang58.github.io/Biomedical_Device_PCB/</a:t>
+            </a:r>
+            <a:endParaRPr lang="en-US" dirty="0"/>
+          </a:p>
+          <a:p>
+            <a:pPr marL="342900" indent="-342900">
               <a:buFont typeface="Arial" panose="020B0604020202020204" pitchFamily="34" charset="0"/>
               <a:buChar char="•"/>
             </a:pPr>
             <a:r>
-              <a:rPr lang="en-US" altLang="en-US" dirty="0">
-                <a:solidFill>
-                  <a:srgbClr val="000000"/>
-                </a:solidFill>
-                <a:latin typeface="Arial" panose="020B0604020202020204" pitchFamily="34" charset="0"/>
-              </a:rPr>
-              <a:t>Maximum Output Current: 100 mA.</a:t>
-            </a:r>
-          </a:p>
-          <a:p>
-            <a:pPr marL="285750" lvl="0" indent="-285750" defTabSz="914400" eaLnBrk="0" fontAlgn="base" hangingPunct="0">
-              <a:lnSpc>
-                <a:spcPct val="100000"/>
-              </a:lnSpc>
-              <a:spcBef>
-                <a:spcPct val="0"/>
-              </a:spcBef>
-              <a:spcAft>
-                <a:spcPct val="0"/>
-              </a:spcAft>
+              <a:rPr lang="en-US" dirty="0"/>
+              <a:t>Uses a </a:t>
+            </a:r>
+            <a:r>
+              <a:rPr lang="en-US" dirty="0" err="1"/>
+              <a:t>InterDB</a:t>
+            </a:r>
+            <a:r>
+              <a:rPr lang="en-US" dirty="0"/>
+              <a:t> Database to store data instead of relying on local storage on a user(s) device</a:t>
+            </a:r>
+          </a:p>
+          <a:p>
+            <a:pPr marL="342900" indent="-342900">
               <a:buFont typeface="Arial" panose="020B0604020202020204" pitchFamily="34" charset="0"/>
               <a:buChar char="•"/>
             </a:pPr>
             <a:r>
-              <a:rPr lang="en-US" altLang="en-US" dirty="0">
-                <a:solidFill>
-                  <a:srgbClr val="000000"/>
-                </a:solidFill>
-                <a:latin typeface="Arial" panose="020B0604020202020204" pitchFamily="34" charset="0"/>
-              </a:rPr>
-              <a:t>Configurable Output Voltage: Up to 4.2V for Lithium-Ion or 3.3V for Alkaline.</a:t>
-            </a:r>
-          </a:p>
-          <a:p>
-            <a:pPr marL="285750" lvl="0" indent="-285750" defTabSz="914400" eaLnBrk="0" fontAlgn="base" hangingPunct="0">
-              <a:lnSpc>
-                <a:spcPct val="100000"/>
-              </a:lnSpc>
-              <a:spcBef>
-                <a:spcPct val="0"/>
-              </a:spcBef>
-              <a:spcAft>
-                <a:spcPct val="0"/>
-              </a:spcAft>
-              <a:buFont typeface="Arial" panose="020B0604020202020204" pitchFamily="34" charset="0"/>
-              <a:buChar char="•"/>
-            </a:pPr>
-            <a:r>
-              <a:rPr lang="en-US" altLang="en-US" dirty="0">
-                <a:solidFill>
-                  <a:srgbClr val="000000"/>
-                </a:solidFill>
-                <a:latin typeface="Arial" panose="020B0604020202020204" pitchFamily="34" charset="0"/>
-              </a:rPr>
-              <a:t>Conversion Efficiency: Exceeds </a:t>
-            </a:r>
-            <a:r>
-              <a:rPr lang="en-US" altLang="en-US" b="1" dirty="0">
-                <a:solidFill>
-                  <a:srgbClr val="000000"/>
-                </a:solidFill>
-                <a:latin typeface="Arial" panose="020B0604020202020204" pitchFamily="34" charset="0"/>
-              </a:rPr>
-              <a:t>70%</a:t>
-            </a:r>
-            <a:r>
-              <a:rPr lang="en-US" altLang="en-US" dirty="0">
-                <a:solidFill>
-                  <a:srgbClr val="000000"/>
-                </a:solidFill>
-                <a:latin typeface="Arial" panose="020B0604020202020204" pitchFamily="34" charset="0"/>
-              </a:rPr>
-              <a:t> efficiency when converting RF energy to DC power.</a:t>
-            </a:r>
-          </a:p>
-          <a:p>
-            <a:pPr marL="285750" indent="-285750">
+              <a:rPr lang="en-US" dirty="0"/>
+              <a:t>Storage to the Database based on an API call within the code</a:t>
+            </a:r>
+          </a:p>
+          <a:p>
+            <a:pPr marL="342900" indent="-342900">
               <a:buFont typeface="Arial" panose="020B0604020202020204" pitchFamily="34" charset="0"/>
               <a:buChar char="•"/>
             </a:pPr>
@@ -14568,7 +16909,7 @@
           <p:cNvPr id="4" name="Title 3">
             <a:extLst>
               <a:ext uri="{FF2B5EF4-FFF2-40B4-BE49-F238E27FC236}">
-                <a16:creationId xmlns:a16="http://schemas.microsoft.com/office/drawing/2014/main" id="{C44A8C05-A32A-4D3D-5945-A8A955FC5BF6}"/>
+                <a16:creationId xmlns:a16="http://schemas.microsoft.com/office/drawing/2014/main" id="{816157D9-2A77-F047-ED77-198A84B64783}"/>
               </a:ext>
             </a:extLst>
           </p:cNvPr>
@@ -14586,7 +16927,7 @@
           <a:p>
             <a:r>
               <a:rPr lang="en-US" dirty="0"/>
-              <a:t>PCB Updates</a:t>
+              <a:t>Collection</a:t>
             </a:r>
           </a:p>
         </p:txBody>
@@ -14596,7 +16937,7 @@
           <p:cNvPr id="5" name="Footer Placeholder 4">
             <a:extLst>
               <a:ext uri="{FF2B5EF4-FFF2-40B4-BE49-F238E27FC236}">
-                <a16:creationId xmlns:a16="http://schemas.microsoft.com/office/drawing/2014/main" id="{3C4EE2F1-48E6-5FAE-F1C6-EEE3CD7B912D}"/>
+                <a16:creationId xmlns:a16="http://schemas.microsoft.com/office/drawing/2014/main" id="{F3CCE763-D63A-45AB-FB58-601F3E7F0EF9}"/>
               </a:ext>
             </a:extLst>
           </p:cNvPr>
@@ -14614,17 +16955,90 @@
           <a:p>
             <a:pPr algn="r"/>
             <a:r>
-              <a:rPr lang="en-US"/>
-              <a:t>3/31/23            ‹#›</a:t>
-            </a:r>
-            <a:endParaRPr lang="en-US" dirty="0"/>
-          </a:p>
-        </p:txBody>
-      </p:sp>
+              <a:rPr lang="en-US" dirty="0"/>
+              <a:t>5/15</a:t>
+            </a:r>
+          </a:p>
+        </p:txBody>
+      </p:sp>
+      <p:pic>
+        <p:nvPicPr>
+          <p:cNvPr id="7" name="Picture 6">
+            <a:extLst>
+              <a:ext uri="{FF2B5EF4-FFF2-40B4-BE49-F238E27FC236}">
+                <a16:creationId xmlns:a16="http://schemas.microsoft.com/office/drawing/2014/main" id="{25651AF0-DF86-133E-DFFA-3357ACFDA469}"/>
+              </a:ext>
+            </a:extLst>
+          </p:cNvPr>
+          <p:cNvPicPr>
+            <a:picLocks noChangeAspect="1"/>
+          </p:cNvPicPr>
+          <p:nvPr/>
+        </p:nvPicPr>
+        <p:blipFill>
+          <a:blip r:embed="rId3"/>
+          <a:stretch>
+            <a:fillRect/>
+          </a:stretch>
+        </p:blipFill>
+        <p:spPr>
+          <a:xfrm>
+            <a:off x="701636" y="3079915"/>
+            <a:ext cx="7429500" cy="1790700"/>
+          </a:xfrm>
+          <a:prstGeom prst="rect">
+            <a:avLst/>
+          </a:prstGeom>
+        </p:spPr>
+      </p:pic>
+      <p:cxnSp>
+        <p:nvCxnSpPr>
+          <p:cNvPr id="8" name="Straight Arrow Connector 7">
+            <a:extLst>
+              <a:ext uri="{FF2B5EF4-FFF2-40B4-BE49-F238E27FC236}">
+                <a16:creationId xmlns:a16="http://schemas.microsoft.com/office/drawing/2014/main" id="{5774440C-50C4-5F10-472A-A32FC52B7E8B}"/>
+              </a:ext>
+            </a:extLst>
+          </p:cNvPr>
+          <p:cNvCxnSpPr>
+            <a:cxnSpLocks/>
+          </p:cNvCxnSpPr>
+          <p:nvPr/>
+        </p:nvCxnSpPr>
+        <p:spPr>
+          <a:xfrm>
+            <a:off x="2565070" y="2826327"/>
+            <a:ext cx="938151" cy="602673"/>
+          </a:xfrm>
+          <a:prstGeom prst="straightConnector1">
+            <a:avLst/>
+          </a:prstGeom>
+          <a:ln>
+            <a:solidFill>
+              <a:srgbClr val="FF0000"/>
+            </a:solidFill>
+            <a:tailEnd type="triangle"/>
+          </a:ln>
+        </p:spPr>
+        <p:style>
+          <a:lnRef idx="1">
+            <a:schemeClr val="accent1"/>
+          </a:lnRef>
+          <a:fillRef idx="0">
+            <a:schemeClr val="accent1"/>
+          </a:fillRef>
+          <a:effectRef idx="0">
+            <a:schemeClr val="accent1"/>
+          </a:effectRef>
+          <a:fontRef idx="minor">
+            <a:schemeClr val="tx1"/>
+          </a:fontRef>
+        </p:style>
+      </p:cxnSp>
     </p:spTree>
     <p:extLst>
       <p:ext uri="{BB962C8B-B14F-4D97-AF65-F5344CB8AC3E}">
-        <p14:creationId xmlns:p14="http://schemas.microsoft.com/office/powerpoint/2010/main" val="1570870436"/>
+        <p14:creationId xmlns:p14="http://schemas.microsoft.com/office/powerpoint/2010/main" val="1750352945"/>
       </p:ext>
     </p:extLst>
   </p:cSld>
@@ -14651,12 +17065,145 @@
           <a:chExt cx="0" cy="0"/>
         </a:xfrm>
       </p:grpSpPr>
+      <p:sp>
+        <p:nvSpPr>
+          <p:cNvPr id="2" name="Text Placeholder 1">
+            <a:extLst>
+              <a:ext uri="{FF2B5EF4-FFF2-40B4-BE49-F238E27FC236}">
+                <a16:creationId xmlns:a16="http://schemas.microsoft.com/office/drawing/2014/main" id="{E1523ED9-E902-41EB-B91E-FB83BFF7A7E8}"/>
+              </a:ext>
+            </a:extLst>
+          </p:cNvPr>
+          <p:cNvSpPr>
+            <a:spLocks noGrp="1"/>
+          </p:cNvSpPr>
+          <p:nvPr>
+            <p:ph type="body" sz="quarter" idx="11"/>
+          </p:nvPr>
+        </p:nvSpPr>
+        <p:spPr/>
+        <p:txBody>
+          <a:bodyPr/>
+          <a:lstStyle/>
+          <a:p>
+            <a:r>
+              <a:rPr lang="en-US" dirty="0"/>
+              <a:t>Fundamental circuit diagram completed</a:t>
+            </a:r>
+          </a:p>
+        </p:txBody>
+      </p:sp>
+      <p:sp>
+        <p:nvSpPr>
+          <p:cNvPr id="3" name="Text Placeholder 2">
+            <a:extLst>
+              <a:ext uri="{FF2B5EF4-FFF2-40B4-BE49-F238E27FC236}">
+                <a16:creationId xmlns:a16="http://schemas.microsoft.com/office/drawing/2014/main" id="{45D56D9F-C146-2FD2-C007-D5F2E8B03DB5}"/>
+              </a:ext>
+            </a:extLst>
+          </p:cNvPr>
+          <p:cNvSpPr>
+            <a:spLocks noGrp="1"/>
+          </p:cNvSpPr>
+          <p:nvPr>
+            <p:ph type="body" sz="quarter" idx="10"/>
+          </p:nvPr>
+        </p:nvSpPr>
+        <p:spPr/>
+        <p:txBody>
+          <a:bodyPr/>
+          <a:lstStyle/>
+          <a:p>
+            <a:pPr marL="285750" indent="-285750">
+              <a:buFont typeface="Arial" panose="020B0604020202020204" pitchFamily="34" charset="0"/>
+              <a:buChar char="•"/>
+            </a:pPr>
+            <a:r>
+              <a:rPr lang="en-US" dirty="0"/>
+              <a:t>Based on primitive circuit found in datasheet</a:t>
+            </a:r>
+          </a:p>
+          <a:p>
+            <a:pPr marL="285750" indent="-285750">
+              <a:buFont typeface="Arial" panose="020B0604020202020204" pitchFamily="34" charset="0"/>
+              <a:buChar char="•"/>
+            </a:pPr>
+            <a:r>
+              <a:rPr lang="en-US" dirty="0"/>
+              <a:t>Other circuit specifications needed to be outlined</a:t>
+            </a:r>
+          </a:p>
+          <a:p>
+            <a:r>
+              <a:rPr lang="en-US" dirty="0"/>
+              <a:t> </a:t>
+            </a:r>
+          </a:p>
+        </p:txBody>
+      </p:sp>
+      <p:sp>
+        <p:nvSpPr>
+          <p:cNvPr id="4" name="Title 3">
+            <a:extLst>
+              <a:ext uri="{FF2B5EF4-FFF2-40B4-BE49-F238E27FC236}">
+                <a16:creationId xmlns:a16="http://schemas.microsoft.com/office/drawing/2014/main" id="{1C723DBC-DDFE-A4F9-6047-A6D5B746AE84}"/>
+              </a:ext>
+            </a:extLst>
+          </p:cNvPr>
+          <p:cNvSpPr>
+            <a:spLocks noGrp="1"/>
+          </p:cNvSpPr>
+          <p:nvPr>
+            <p:ph type="title"/>
+          </p:nvPr>
+        </p:nvSpPr>
+        <p:spPr/>
+        <p:txBody>
+          <a:bodyPr/>
+          <a:lstStyle/>
+          <a:p>
+            <a:r>
+              <a:rPr lang="en-US" dirty="0"/>
+              <a:t>PCB Updates</a:t>
+            </a:r>
+          </a:p>
+        </p:txBody>
+      </p:sp>
+      <p:sp>
+        <p:nvSpPr>
+          <p:cNvPr id="5" name="Footer Placeholder 4">
+            <a:extLst>
+              <a:ext uri="{FF2B5EF4-FFF2-40B4-BE49-F238E27FC236}">
+                <a16:creationId xmlns:a16="http://schemas.microsoft.com/office/drawing/2014/main" id="{7C963C46-0BFF-7FA5-2331-318C5F7E3BCE}"/>
+              </a:ext>
+            </a:extLst>
+          </p:cNvPr>
+          <p:cNvSpPr>
+            <a:spLocks noGrp="1"/>
+          </p:cNvSpPr>
+          <p:nvPr>
+            <p:ph type="ftr" sz="quarter" idx="12"/>
+          </p:nvPr>
+        </p:nvSpPr>
+        <p:spPr/>
+        <p:txBody>
+          <a:bodyPr/>
+          <a:lstStyle/>
+          <a:p>
+            <a:pPr algn="r"/>
+            <a:r>
+              <a:rPr lang="en-US" dirty="0"/>
+              <a:t>6/15</a:t>
+            </a:r>
+          </a:p>
+        </p:txBody>
+      </p:sp>
       <p:pic>
         <p:nvPicPr>
-          <p:cNvPr id="8" name="Picture 7">
-            <a:extLst>
-              <a:ext uri="{FF2B5EF4-FFF2-40B4-BE49-F238E27FC236}">
-                <a16:creationId xmlns:a16="http://schemas.microsoft.com/office/drawing/2014/main" id="{D3391C27-AB41-6CBB-7626-428BB976BBF6}"/>
+          <p:cNvPr id="9" name="Picture 8">
+            <a:extLst>
+              <a:ext uri="{FF2B5EF4-FFF2-40B4-BE49-F238E27FC236}">
+                <a16:creationId xmlns:a16="http://schemas.microsoft.com/office/drawing/2014/main" id="{C1C348A3-C0C0-2F79-75B1-0C223796F42E}"/>
               </a:ext>
             </a:extLst>
           </p:cNvPr>
@@ -14667,168 +17214,24 @@
         </p:nvPicPr>
         <p:blipFill>
           <a:blip r:embed="rId2"/>
-          <a:srcRect l="17885" r="2939" b="-3"/>
           <a:stretch>
             <a:fillRect/>
           </a:stretch>
         </p:blipFill>
         <p:spPr>
           <a:xfrm>
-            <a:off x="334735" y="1543323"/>
-            <a:ext cx="4094045" cy="4317728"/>
+            <a:off x="1766223" y="2260082"/>
+            <a:ext cx="6364913" cy="3961221"/>
           </a:xfrm>
           <a:prstGeom prst="rect">
             <a:avLst/>
           </a:prstGeom>
-          <a:noFill/>
         </p:spPr>
       </p:pic>
-      <p:sp>
-        <p:nvSpPr>
-          <p:cNvPr id="4" name="Title 3">
-            <a:extLst>
-              <a:ext uri="{FF2B5EF4-FFF2-40B4-BE49-F238E27FC236}">
-                <a16:creationId xmlns:a16="http://schemas.microsoft.com/office/drawing/2014/main" id="{7ADFF263-9428-1CA8-E5B8-0F702A65A575}"/>
-              </a:ext>
-            </a:extLst>
-          </p:cNvPr>
-          <p:cNvSpPr>
-            <a:spLocks noGrp="1"/>
-          </p:cNvSpPr>
-          <p:nvPr>
-            <p:ph type="title"/>
-          </p:nvPr>
-        </p:nvSpPr>
-        <p:spPr>
-          <a:xfrm>
-            <a:off x="351064" y="385004"/>
-            <a:ext cx="8450036" cy="589032"/>
-          </a:xfrm>
-        </p:spPr>
-        <p:txBody>
-          <a:bodyPr anchor="ctr">
-            <a:normAutofit/>
-          </a:bodyPr>
-          <a:lstStyle/>
-          <a:p>
-            <a:r>
-              <a:rPr lang="en-US" dirty="0"/>
-              <a:t>Summer Updates</a:t>
-            </a:r>
-          </a:p>
-        </p:txBody>
-      </p:sp>
-      <p:pic>
-        <p:nvPicPr>
-          <p:cNvPr id="6" name="Picture 5">
-            <a:extLst>
-              <a:ext uri="{FF2B5EF4-FFF2-40B4-BE49-F238E27FC236}">
-                <a16:creationId xmlns:a16="http://schemas.microsoft.com/office/drawing/2014/main" id="{F2015592-8EAE-A448-DD12-44CD504CF832}"/>
-              </a:ext>
-            </a:extLst>
-          </p:cNvPr>
-          <p:cNvPicPr>
-            <a:picLocks noChangeAspect="1"/>
-          </p:cNvPicPr>
-          <p:nvPr/>
-        </p:nvPicPr>
-        <p:blipFill>
-          <a:blip r:embed="rId3"/>
-          <a:srcRect l="22995" r="38839" b="-1"/>
-          <a:stretch>
-            <a:fillRect/>
-          </a:stretch>
-        </p:blipFill>
-        <p:spPr>
-          <a:xfrm>
-            <a:off x="4715222" y="1543323"/>
-            <a:ext cx="4094045" cy="4317728"/>
-          </a:xfrm>
-          <a:prstGeom prst="rect">
-            <a:avLst/>
-          </a:prstGeom>
-          <a:noFill/>
-        </p:spPr>
-      </p:pic>
-      <p:sp>
-        <p:nvSpPr>
-          <p:cNvPr id="2" name="Text Placeholder 1">
-            <a:extLst>
-              <a:ext uri="{FF2B5EF4-FFF2-40B4-BE49-F238E27FC236}">
-                <a16:creationId xmlns:a16="http://schemas.microsoft.com/office/drawing/2014/main" id="{E99F78C8-F24C-7278-BB5C-75F842CA3BDF}"/>
-              </a:ext>
-            </a:extLst>
-          </p:cNvPr>
-          <p:cNvSpPr>
-            <a:spLocks noGrp="1"/>
-          </p:cNvSpPr>
-          <p:nvPr>
-            <p:ph type="body" sz="quarter" idx="13"/>
-          </p:nvPr>
-        </p:nvSpPr>
-        <p:spPr>
-          <a:xfrm>
-            <a:off x="342900" y="954291"/>
-            <a:ext cx="8458200" cy="365760"/>
-          </a:xfrm>
-        </p:spPr>
-        <p:txBody>
-          <a:bodyPr>
-            <a:normAutofit lnSpcReduction="10000"/>
-          </a:bodyPr>
-          <a:lstStyle/>
-          <a:p>
-            <a:r>
-              <a:rPr lang="en-US" dirty="0"/>
-              <a:t>Summer Calendar Submitted and Signed</a:t>
-            </a:r>
-          </a:p>
-        </p:txBody>
-      </p:sp>
-      <p:sp>
-        <p:nvSpPr>
-          <p:cNvPr id="5" name="Footer Placeholder 4">
-            <a:extLst>
-              <a:ext uri="{FF2B5EF4-FFF2-40B4-BE49-F238E27FC236}">
-                <a16:creationId xmlns:a16="http://schemas.microsoft.com/office/drawing/2014/main" id="{0489ED17-7247-9D2F-86FD-88680F0AC65B}"/>
-              </a:ext>
-            </a:extLst>
-          </p:cNvPr>
-          <p:cNvSpPr>
-            <a:spLocks noGrp="1"/>
-          </p:cNvSpPr>
-          <p:nvPr>
-            <p:ph type="ftr" sz="quarter" idx="14"/>
-          </p:nvPr>
-        </p:nvSpPr>
-        <p:spPr>
-          <a:xfrm>
-            <a:off x="7461174" y="6295058"/>
-            <a:ext cx="1339925" cy="323970"/>
-          </a:xfrm>
-        </p:spPr>
-        <p:txBody>
-          <a:bodyPr anchor="ctr">
-            <a:normAutofit/>
-          </a:bodyPr>
-          <a:lstStyle/>
-          <a:p>
-            <a:pPr algn="r">
-              <a:spcAft>
-                <a:spcPts val="600"/>
-              </a:spcAft>
-            </a:pPr>
-            <a:r>
-              <a:rPr lang="en-US"/>
-              <a:t>3/31/23            ‹#›</a:t>
-            </a:r>
-          </a:p>
-        </p:txBody>
-      </p:sp>
     </p:spTree>
     <p:extLst>
       <p:ext uri="{BB962C8B-B14F-4D97-AF65-F5344CB8AC3E}">
-        <p14:creationId xmlns:p14="http://schemas.microsoft.com/office/powerpoint/2010/main" val="746291089"/>
+        <p14:creationId xmlns:p14="http://schemas.microsoft.com/office/powerpoint/2010/main" val="3626061454"/>
       </p:ext>
     </p:extLst>
   </p:cSld>
@@ -14843,7 +17246,13 @@
   <p:cSld>
     <p:spTree>
       <p:nvGrpSpPr>
-        <p:cNvPr id="1" name=""/>
+        <p:cNvPr id="1" name="">
+          <a:extLst>
+            <a:ext uri="{FF2B5EF4-FFF2-40B4-BE49-F238E27FC236}">
+              <a16:creationId xmlns:a16="http://schemas.microsoft.com/office/drawing/2014/main" id="{9AD418B5-B6E0-FAB9-2B93-016B94FC7E3D}"/>
+            </a:ext>
+          </a:extLst>
+        </p:cNvPr>
         <p:cNvGrpSpPr/>
         <p:nvPr/>
       </p:nvGrpSpPr>
@@ -14860,7 +17269,7 @@
           <p:cNvPr id="2" name="Text Placeholder 1">
             <a:extLst>
               <a:ext uri="{FF2B5EF4-FFF2-40B4-BE49-F238E27FC236}">
-                <a16:creationId xmlns:a16="http://schemas.microsoft.com/office/drawing/2014/main" id="{059C2505-4B84-A349-C668-3F3894CA795A}"/>
+                <a16:creationId xmlns:a16="http://schemas.microsoft.com/office/drawing/2014/main" id="{93F6016F-2109-6A59-6693-2A13AC2DB5F1}"/>
               </a:ext>
             </a:extLst>
           </p:cNvPr>
@@ -14878,7 +17287,7 @@
           <a:p>
             <a:r>
               <a:rPr lang="en-US" dirty="0"/>
-              <a:t>Required Trainings Completed</a:t>
+              <a:t>Fundamental circuit diagram completed</a:t>
             </a:r>
           </a:p>
         </p:txBody>
@@ -14888,7 +17297,7 @@
           <p:cNvPr id="3" name="Text Placeholder 2">
             <a:extLst>
               <a:ext uri="{FF2B5EF4-FFF2-40B4-BE49-F238E27FC236}">
-                <a16:creationId xmlns:a16="http://schemas.microsoft.com/office/drawing/2014/main" id="{77A66639-A00C-0B57-3084-E2A2A893567B}"/>
+                <a16:creationId xmlns:a16="http://schemas.microsoft.com/office/drawing/2014/main" id="{7D3877D4-AD31-5E2E-FACE-F4197CAF0C2E}"/>
               </a:ext>
             </a:extLst>
           </p:cNvPr>
@@ -14910,7 +17319,7 @@
             </a:pPr>
             <a:r>
               <a:rPr lang="en-US" dirty="0"/>
-              <a:t>Responsible Conduct of Research (RCR)</a:t>
+              <a:t>Mechanical design specifications outlined:</a:t>
             </a:r>
           </a:p>
           <a:p>
@@ -14920,7 +17329,57 @@
             </a:pPr>
             <a:r>
               <a:rPr lang="en-US" dirty="0"/>
-              <a:t>Ethics Training</a:t>
+              <a:t>Units in inches (hard to locate)</a:t>
+            </a:r>
+          </a:p>
+          <a:p>
+            <a:pPr marL="285750" indent="-285750">
+              <a:buFont typeface="Arial" panose="020B0604020202020204" pitchFamily="34" charset="0"/>
+              <a:buChar char="•"/>
+            </a:pPr>
+            <a:r>
+              <a:rPr lang="en-US" dirty="0"/>
+              <a:t>50 impedance antenna required (The antenna we have is sufficient)</a:t>
+            </a:r>
+          </a:p>
+          <a:p>
+            <a:pPr marL="628650" lvl="1" indent="-285750">
+              <a:buFont typeface="Arial" panose="020B0604020202020204" pitchFamily="34" charset="0"/>
+              <a:buChar char="•"/>
+            </a:pPr>
+            <a:r>
+              <a:rPr lang="en-US" dirty="0"/>
+              <a:t>0.550 x 0.430 x 0.033 in^3</a:t>
+            </a:r>
+          </a:p>
+          <a:p>
+            <a:pPr marL="628650" lvl="1" indent="-285750">
+              <a:buFont typeface="Arial" panose="020B0604020202020204" pitchFamily="34" charset="0"/>
+              <a:buChar char="•"/>
+            </a:pPr>
+            <a:r>
+              <a:rPr lang="en-US" dirty="0"/>
+              <a:t>13.97 x 10.92 x 2.31 mm^3</a:t>
+            </a:r>
+          </a:p>
+          <a:p>
+            <a:pPr marL="285750" indent="-285750">
+              <a:buFont typeface="Arial" panose="020B0604020202020204" pitchFamily="34" charset="0"/>
+              <a:buChar char="•"/>
+            </a:pPr>
+            <a:r>
+              <a:rPr lang="en-US" dirty="0"/>
+              <a:t>Sufficient space on board</a:t>
+            </a:r>
+          </a:p>
+          <a:p>
+            <a:pPr marL="628650" lvl="1" indent="-285750">
+              <a:buFont typeface="Arial" panose="020B0604020202020204" pitchFamily="34" charset="0"/>
+              <a:buChar char="•"/>
+            </a:pPr>
+            <a:r>
+              <a:rPr lang="en-US" dirty="0"/>
+              <a:t>See next slide</a:t>
             </a:r>
           </a:p>
         </p:txBody>
@@ -14930,7 +17389,7 @@
           <p:cNvPr id="4" name="Title 3">
             <a:extLst>
               <a:ext uri="{FF2B5EF4-FFF2-40B4-BE49-F238E27FC236}">
-                <a16:creationId xmlns:a16="http://schemas.microsoft.com/office/drawing/2014/main" id="{E4E336BE-E7F8-786B-D2FF-C9A1B92EF7FA}"/>
+                <a16:creationId xmlns:a16="http://schemas.microsoft.com/office/drawing/2014/main" id="{7D846DC2-8443-3130-5E38-CD8A461EA9FA}"/>
               </a:ext>
             </a:extLst>
           </p:cNvPr>
@@ -14948,7 +17407,7 @@
           <a:p>
             <a:r>
               <a:rPr lang="en-US" dirty="0"/>
-              <a:t>Training Updates</a:t>
+              <a:t>PCB Updates</a:t>
             </a:r>
           </a:p>
         </p:txBody>
@@ -14958,7 +17417,7 @@
           <p:cNvPr id="5" name="Footer Placeholder 4">
             <a:extLst>
               <a:ext uri="{FF2B5EF4-FFF2-40B4-BE49-F238E27FC236}">
-                <a16:creationId xmlns:a16="http://schemas.microsoft.com/office/drawing/2014/main" id="{3FFD0753-F465-0006-D083-51AE933A97AC}"/>
+                <a16:creationId xmlns:a16="http://schemas.microsoft.com/office/drawing/2014/main" id="{4BD5CC84-D86D-AF09-2A5C-F9C264B749F1}"/>
               </a:ext>
             </a:extLst>
           </p:cNvPr>
@@ -14976,17 +17435,46 @@
           <a:p>
             <a:pPr algn="r"/>
             <a:r>
-              <a:rPr lang="en-US"/>
-              <a:t>3/31/23            ‹#›</a:t>
-            </a:r>
-            <a:endParaRPr lang="en-US" dirty="0"/>
-          </a:p>
-        </p:txBody>
-      </p:sp>
+              <a:rPr lang="en-US" dirty="0"/>
+              <a:t>7/15</a:t>
+            </a:r>
+          </a:p>
+        </p:txBody>
+      </p:sp>
+      <p:pic>
+        <p:nvPicPr>
+          <p:cNvPr id="7" name="Picture 6">
+            <a:extLst>
+              <a:ext uri="{FF2B5EF4-FFF2-40B4-BE49-F238E27FC236}">
+                <a16:creationId xmlns:a16="http://schemas.microsoft.com/office/drawing/2014/main" id="{C34BF28F-AB86-D18A-2FCA-22B09536409F}"/>
+              </a:ext>
+            </a:extLst>
+          </p:cNvPr>
+          <p:cNvPicPr>
+            <a:picLocks noChangeAspect="1"/>
+          </p:cNvPicPr>
+          <p:nvPr/>
+        </p:nvPicPr>
+        <p:blipFill>
+          <a:blip r:embed="rId2"/>
+          <a:stretch>
+            <a:fillRect/>
+          </a:stretch>
+        </p:blipFill>
+        <p:spPr>
+          <a:xfrm>
+            <a:off x="3434184" y="2759315"/>
+            <a:ext cx="4696952" cy="3697728"/>
+          </a:xfrm>
+          <a:prstGeom prst="rect">
+            <a:avLst/>
+          </a:prstGeom>
+        </p:spPr>
+      </p:pic>
     </p:spTree>
     <p:extLst>
       <p:ext uri="{BB962C8B-B14F-4D97-AF65-F5344CB8AC3E}">
-        <p14:creationId xmlns:p14="http://schemas.microsoft.com/office/powerpoint/2010/main" val="2102298351"/>
+        <p14:creationId xmlns:p14="http://schemas.microsoft.com/office/powerpoint/2010/main" val="3870239963"/>
       </p:ext>
     </p:extLst>
   </p:cSld>
@@ -15018,7 +17506,7 @@
           <p:cNvPr id="2" name="Text Placeholder 1">
             <a:extLst>
               <a:ext uri="{FF2B5EF4-FFF2-40B4-BE49-F238E27FC236}">
-                <a16:creationId xmlns:a16="http://schemas.microsoft.com/office/drawing/2014/main" id="{0CD72587-DF24-E361-3C87-CFAE3C408C3A}"/>
+                <a16:creationId xmlns:a16="http://schemas.microsoft.com/office/drawing/2014/main" id="{DE52DC19-3BDD-4E5A-CF64-E0B6A280C0A6}"/>
               </a:ext>
             </a:extLst>
           </p:cNvPr>
@@ -15036,25 +17524,33 @@
           <a:p>
             <a:r>
               <a:rPr lang="en-US" dirty="0"/>
-              <a:t>Next Week’s Plan</a:t>
-            </a:r>
-          </a:p>
-        </p:txBody>
-      </p:sp>
-      <p:sp>
-        <p:nvSpPr>
-          <p:cNvPr id="3" name="Text Placeholder 2">
-            <a:extLst>
-              <a:ext uri="{FF2B5EF4-FFF2-40B4-BE49-F238E27FC236}">
-                <a16:creationId xmlns:a16="http://schemas.microsoft.com/office/drawing/2014/main" id="{54C18513-FBE2-EBBB-125E-FA48BA6B1BEC}"/>
-              </a:ext>
-            </a:extLst>
-          </p:cNvPr>
-          <p:cNvSpPr>
-            <a:spLocks noGrp="1"/>
-          </p:cNvSpPr>
-          <p:nvPr>
-            <p:ph type="body" sz="quarter" idx="10"/>
+              <a:t>Updated </a:t>
+            </a:r>
+            <a:r>
+              <a:rPr lang="en-US" dirty="0" err="1"/>
+              <a:t>KiCAD</a:t>
+            </a:r>
+            <a:r>
+              <a:rPr lang="en-US" dirty="0"/>
+              <a:t> full circuit</a:t>
+            </a:r>
+          </a:p>
+        </p:txBody>
+      </p:sp>
+      <p:sp>
+        <p:nvSpPr>
+          <p:cNvPr id="4" name="Title 3">
+            <a:extLst>
+              <a:ext uri="{FF2B5EF4-FFF2-40B4-BE49-F238E27FC236}">
+                <a16:creationId xmlns:a16="http://schemas.microsoft.com/office/drawing/2014/main" id="{F9DCEB37-7390-C5DF-E898-E0C25D4A3C80}"/>
+              </a:ext>
+            </a:extLst>
+          </p:cNvPr>
+          <p:cNvSpPr>
+            <a:spLocks noGrp="1"/>
+          </p:cNvSpPr>
+          <p:nvPr>
+            <p:ph type="title"/>
           </p:nvPr>
         </p:nvSpPr>
         <p:spPr/>
@@ -15062,112 +17558,27 @@
           <a:bodyPr/>
           <a:lstStyle/>
           <a:p>
-            <a:pPr marL="285750" indent="-285750">
-              <a:buFont typeface="Arial" panose="020B0604020202020204" pitchFamily="34" charset="0"/>
-              <a:buChar char="•"/>
-            </a:pPr>
-            <a:r>
-              <a:rPr lang="en-US" strike="sngStrike" dirty="0"/>
-              <a:t>Look into AWS as potential data storage solution</a:t>
-            </a:r>
-          </a:p>
-          <a:p>
-            <a:pPr marL="628650" lvl="1" indent="-285750">
-              <a:buFont typeface="Arial" panose="020B0604020202020204" pitchFamily="34" charset="0"/>
-              <a:buChar char="•"/>
-            </a:pPr>
-            <a:r>
-              <a:rPr lang="en-US" strike="sngStrike" dirty="0"/>
-              <a:t>S3 bucket is very cheap</a:t>
-            </a:r>
-          </a:p>
-          <a:p>
-            <a:pPr marL="628650" lvl="1" indent="-285750">
-              <a:buFont typeface="Arial" panose="020B0604020202020204" pitchFamily="34" charset="0"/>
-              <a:buChar char="•"/>
-            </a:pPr>
-            <a:r>
-              <a:rPr lang="en-US" strike="sngStrike" dirty="0"/>
-              <a:t>Other options could open up</a:t>
-            </a:r>
-          </a:p>
-          <a:p>
-            <a:pPr marL="285750" indent="-285750">
-              <a:buFont typeface="Arial" panose="020B0604020202020204" pitchFamily="34" charset="0"/>
-              <a:buChar char="•"/>
-            </a:pPr>
-            <a:r>
-              <a:rPr lang="en-US" dirty="0"/>
-              <a:t>Before Sync-Up:</a:t>
-            </a:r>
-          </a:p>
-          <a:p>
-            <a:pPr marL="628650" lvl="1" indent="-285750">
-              <a:buFont typeface="Arial" panose="020B0604020202020204" pitchFamily="34" charset="0"/>
-              <a:buChar char="•"/>
-            </a:pPr>
-            <a:r>
-              <a:rPr lang="en-US" dirty="0"/>
-              <a:t>Getting demonstration to work</a:t>
-            </a:r>
-          </a:p>
-          <a:p>
-            <a:pPr marL="628650" lvl="1" indent="-285750">
-              <a:buFont typeface="Arial" panose="020B0604020202020204" pitchFamily="34" charset="0"/>
-              <a:buChar char="•"/>
-            </a:pPr>
-            <a:r>
-              <a:rPr lang="en-US" dirty="0"/>
-              <a:t>Showing Omosalewa how to program the firmware for the updated Nicla Sense code</a:t>
-            </a:r>
-          </a:p>
-          <a:p>
-            <a:pPr marL="628650" lvl="1" indent="-285750">
-              <a:buFont typeface="Arial" panose="020B0604020202020204" pitchFamily="34" charset="0"/>
-              <a:buChar char="•"/>
-            </a:pPr>
-            <a:r>
-              <a:rPr lang="en-US" dirty="0"/>
-              <a:t>Find a good time to meet with Omosalewa in-person moving forward</a:t>
-            </a:r>
-          </a:p>
-          <a:p>
-            <a:pPr marL="628650" lvl="1" indent="-285750">
-              <a:buFont typeface="Arial" panose="020B0604020202020204" pitchFamily="34" charset="0"/>
-              <a:buChar char="•"/>
-            </a:pPr>
-            <a:endParaRPr lang="en-US" dirty="0"/>
-          </a:p>
-          <a:p>
-            <a:pPr marL="285750" indent="-285750">
-              <a:buFont typeface="Arial" panose="020B0604020202020204" pitchFamily="34" charset="0"/>
-              <a:buChar char="•"/>
-            </a:pPr>
-            <a:endParaRPr lang="en-US" dirty="0"/>
-          </a:p>
-          <a:p>
-            <a:pPr marL="285750" indent="-285750">
-              <a:buFont typeface="Arial" panose="020B0604020202020204" pitchFamily="34" charset="0"/>
-              <a:buChar char="•"/>
-            </a:pPr>
-            <a:endParaRPr lang="en-US" dirty="0"/>
-          </a:p>
-        </p:txBody>
-      </p:sp>
-      <p:sp>
-        <p:nvSpPr>
-          <p:cNvPr id="4" name="Title 3">
-            <a:extLst>
-              <a:ext uri="{FF2B5EF4-FFF2-40B4-BE49-F238E27FC236}">
-                <a16:creationId xmlns:a16="http://schemas.microsoft.com/office/drawing/2014/main" id="{38C5F57F-D41F-FAF8-68C5-CD8D95AF87F4}"/>
-              </a:ext>
-            </a:extLst>
-          </p:cNvPr>
-          <p:cNvSpPr>
-            <a:spLocks noGrp="1"/>
-          </p:cNvSpPr>
-          <p:nvPr>
-            <p:ph type="title"/>
+            <a:r>
+              <a:rPr lang="en-US" dirty="0"/>
+              <a:t>PCB Updates</a:t>
+            </a:r>
+          </a:p>
+        </p:txBody>
+      </p:sp>
+      <p:sp>
+        <p:nvSpPr>
+          <p:cNvPr id="5" name="Footer Placeholder 4">
+            <a:extLst>
+              <a:ext uri="{FF2B5EF4-FFF2-40B4-BE49-F238E27FC236}">
+                <a16:creationId xmlns:a16="http://schemas.microsoft.com/office/drawing/2014/main" id="{E94B7C1B-A5EE-A831-AD4E-ACA73CC6EFDE}"/>
+              </a:ext>
+            </a:extLst>
+          </p:cNvPr>
+          <p:cNvSpPr>
+            <a:spLocks noGrp="1"/>
+          </p:cNvSpPr>
+          <p:nvPr>
+            <p:ph type="ftr" sz="quarter" idx="12"/>
           </p:nvPr>
         </p:nvSpPr>
         <p:spPr/>
@@ -15175,46 +17586,107 @@
           <a:bodyPr/>
           <a:lstStyle/>
           <a:p>
-            <a:r>
-              <a:rPr lang="en-US" dirty="0"/>
-              <a:t>Next Week</a:t>
-            </a:r>
-          </a:p>
-        </p:txBody>
-      </p:sp>
-      <p:sp>
-        <p:nvSpPr>
-          <p:cNvPr id="5" name="Footer Placeholder 4">
-            <a:extLst>
-              <a:ext uri="{FF2B5EF4-FFF2-40B4-BE49-F238E27FC236}">
-                <a16:creationId xmlns:a16="http://schemas.microsoft.com/office/drawing/2014/main" id="{8E633180-B8A6-C9B8-09AC-F39A8DDB0F4A}"/>
-              </a:ext>
-            </a:extLst>
-          </p:cNvPr>
-          <p:cNvSpPr>
-            <a:spLocks noGrp="1"/>
-          </p:cNvSpPr>
-          <p:nvPr>
-            <p:ph type="ftr" sz="quarter" idx="12"/>
-          </p:nvPr>
-        </p:nvSpPr>
-        <p:spPr/>
-        <p:txBody>
-          <a:bodyPr/>
+            <a:pPr algn="r"/>
+            <a:r>
+              <a:rPr lang="en-US" dirty="0"/>
+              <a:t>8/15</a:t>
+            </a:r>
+          </a:p>
+        </p:txBody>
+      </p:sp>
+      <p:pic>
+        <p:nvPicPr>
+          <p:cNvPr id="6" name="Picture 5">
+            <a:extLst>
+              <a:ext uri="{FF2B5EF4-FFF2-40B4-BE49-F238E27FC236}">
+                <a16:creationId xmlns:a16="http://schemas.microsoft.com/office/drawing/2014/main" id="{6B058EF4-2C52-5FDF-795F-F713B6B742DD}"/>
+              </a:ext>
+            </a:extLst>
+          </p:cNvPr>
+          <p:cNvPicPr>
+            <a:picLocks noChangeAspect="1"/>
+          </p:cNvPicPr>
+          <p:nvPr/>
+        </p:nvPicPr>
+        <p:blipFill>
+          <a:blip r:embed="rId3"/>
+          <a:stretch>
+            <a:fillRect/>
+          </a:stretch>
+        </p:blipFill>
+        <p:spPr>
+          <a:xfrm>
+            <a:off x="995301" y="1405795"/>
+            <a:ext cx="6824970" cy="4543248"/>
+          </a:xfrm>
+          <a:prstGeom prst="rect">
+            <a:avLst/>
+          </a:prstGeom>
+        </p:spPr>
+      </p:pic>
+      <p:sp>
+        <p:nvSpPr>
+          <p:cNvPr id="7" name="Oval 6">
+            <a:extLst>
+              <a:ext uri="{FF2B5EF4-FFF2-40B4-BE49-F238E27FC236}">
+                <a16:creationId xmlns:a16="http://schemas.microsoft.com/office/drawing/2014/main" id="{4B2E1419-320F-1BAA-BA83-7182ED48C5EF}"/>
+              </a:ext>
+            </a:extLst>
+          </p:cNvPr>
+          <p:cNvSpPr/>
+          <p:nvPr/>
+        </p:nvSpPr>
+        <p:spPr>
+          <a:xfrm>
+            <a:off x="3398485" y="3162977"/>
+            <a:ext cx="2867233" cy="2001305"/>
+          </a:xfrm>
+          <a:prstGeom prst="ellipse">
+            <a:avLst/>
+          </a:prstGeom>
+          <a:noFill/>
+          <a:ln w="38100">
+            <a:solidFill>
+              <a:srgbClr val="FF0000"/>
+            </a:solidFill>
+          </a:ln>
+        </p:spPr>
+        <p:style>
+          <a:lnRef idx="2">
+            <a:schemeClr val="dk1">
+              <a:shade val="50000"/>
+            </a:schemeClr>
+          </a:lnRef>
+          <a:fillRef idx="1">
+            <a:schemeClr val="dk1"/>
+          </a:fillRef>
+          <a:effectRef idx="0">
+            <a:schemeClr val="dk1"/>
+          </a:effectRef>
+          <a:fontRef idx="minor">
+            <a:schemeClr val="lt1"/>
+          </a:fontRef>
+        </p:style>
+        <p:txBody>
+          <a:bodyPr rtlCol="0" anchor="ctr"/>
           <a:lstStyle/>
           <a:p>
-            <a:pPr algn="r"/>
-            <a:r>
-              <a:rPr lang="en-US" dirty="0"/>
-              <a:t>10/11</a:t>
-            </a:r>
+            <a:pPr algn="ctr"/>
+            <a:endParaRPr lang="en-US">
+              <a:ln>
+                <a:solidFill>
+                  <a:srgbClr val="FF0000"/>
+                </a:solidFill>
+              </a:ln>
+              <a:noFill/>
+            </a:endParaRPr>
           </a:p>
         </p:txBody>
       </p:sp>
     </p:spTree>
     <p:extLst>
       <p:ext uri="{BB962C8B-B14F-4D97-AF65-F5344CB8AC3E}">
-        <p14:creationId xmlns:p14="http://schemas.microsoft.com/office/powerpoint/2010/main" val="1589025477"/>
+        <p14:creationId xmlns:p14="http://schemas.microsoft.com/office/powerpoint/2010/main" val="1482394227"/>
       </p:ext>
     </p:extLst>
   </p:cSld>
@@ -15229,7 +17701,13 @@
   <p:cSld>
     <p:spTree>
       <p:nvGrpSpPr>
-        <p:cNvPr id="1" name=""/>
+        <p:cNvPr id="1" name="">
+          <a:extLst>
+            <a:ext uri="{FF2B5EF4-FFF2-40B4-BE49-F238E27FC236}">
+              <a16:creationId xmlns:a16="http://schemas.microsoft.com/office/drawing/2014/main" id="{67B28899-88B2-0C44-63F5-4C3DEA00E6A9}"/>
+            </a:ext>
+          </a:extLst>
+        </p:cNvPr>
         <p:cNvGrpSpPr/>
         <p:nvPr/>
       </p:nvGrpSpPr>
@@ -15243,18 +17721,18 @@
       </p:grpSpPr>
       <p:sp>
         <p:nvSpPr>
-          <p:cNvPr id="2" name="Title 1">
-            <a:extLst>
-              <a:ext uri="{FF2B5EF4-FFF2-40B4-BE49-F238E27FC236}">
-                <a16:creationId xmlns:a16="http://schemas.microsoft.com/office/drawing/2014/main" id="{E4E72CBA-026F-7E96-546F-23B8813A83DA}"/>
-              </a:ext>
-            </a:extLst>
-          </p:cNvPr>
-          <p:cNvSpPr>
-            <a:spLocks noGrp="1"/>
-          </p:cNvSpPr>
-          <p:nvPr>
-            <p:ph type="title"/>
+          <p:cNvPr id="2" name="Text Placeholder 1">
+            <a:extLst>
+              <a:ext uri="{FF2B5EF4-FFF2-40B4-BE49-F238E27FC236}">
+                <a16:creationId xmlns:a16="http://schemas.microsoft.com/office/drawing/2014/main" id="{57A22640-9D05-6A77-C94B-CBCC1522418A}"/>
+              </a:ext>
+            </a:extLst>
+          </p:cNvPr>
+          <p:cNvSpPr>
+            <a:spLocks noGrp="1"/>
+          </p:cNvSpPr>
+          <p:nvPr>
+            <p:ph type="body" sz="quarter" idx="11"/>
           </p:nvPr>
         </p:nvSpPr>
         <p:spPr/>
@@ -15264,17 +17742,104 @@
           <a:p>
             <a:r>
               <a:rPr lang="en-US" dirty="0"/>
-              <a:t>Thank You</a:t>
-            </a:r>
-          </a:p>
-        </p:txBody>
-      </p:sp>
-      <p:sp>
-        <p:nvSpPr>
-          <p:cNvPr id="3" name="Text Placeholder 2">
-            <a:extLst>
-              <a:ext uri="{FF2B5EF4-FFF2-40B4-BE49-F238E27FC236}">
-                <a16:creationId xmlns:a16="http://schemas.microsoft.com/office/drawing/2014/main" id="{CE8FBDCD-BC38-D4A8-A210-EA02F2610057}"/>
+              <a:t>Zoomed in RFID section</a:t>
+            </a:r>
+          </a:p>
+        </p:txBody>
+      </p:sp>
+      <p:sp>
+        <p:nvSpPr>
+          <p:cNvPr id="4" name="Title 3">
+            <a:extLst>
+              <a:ext uri="{FF2B5EF4-FFF2-40B4-BE49-F238E27FC236}">
+                <a16:creationId xmlns:a16="http://schemas.microsoft.com/office/drawing/2014/main" id="{8A22BB8A-F3DF-C225-6CDA-49E8887F2BD5}"/>
+              </a:ext>
+            </a:extLst>
+          </p:cNvPr>
+          <p:cNvSpPr>
+            <a:spLocks noGrp="1"/>
+          </p:cNvSpPr>
+          <p:nvPr>
+            <p:ph type="title"/>
+          </p:nvPr>
+        </p:nvSpPr>
+        <p:spPr/>
+        <p:txBody>
+          <a:bodyPr/>
+          <a:lstStyle/>
+          <a:p>
+            <a:r>
+              <a:rPr lang="en-US" dirty="0"/>
+              <a:t>PCB Updates</a:t>
+            </a:r>
+          </a:p>
+        </p:txBody>
+      </p:sp>
+      <p:sp>
+        <p:nvSpPr>
+          <p:cNvPr id="5" name="Footer Placeholder 4">
+            <a:extLst>
+              <a:ext uri="{FF2B5EF4-FFF2-40B4-BE49-F238E27FC236}">
+                <a16:creationId xmlns:a16="http://schemas.microsoft.com/office/drawing/2014/main" id="{BF15CC4E-07C4-2320-1DF2-9E8244E45FAA}"/>
+              </a:ext>
+            </a:extLst>
+          </p:cNvPr>
+          <p:cNvSpPr>
+            <a:spLocks noGrp="1"/>
+          </p:cNvSpPr>
+          <p:nvPr>
+            <p:ph type="ftr" sz="quarter" idx="12"/>
+          </p:nvPr>
+        </p:nvSpPr>
+        <p:spPr/>
+        <p:txBody>
+          <a:bodyPr/>
+          <a:lstStyle/>
+          <a:p>
+            <a:pPr algn="r"/>
+            <a:r>
+              <a:rPr lang="en-US" dirty="0"/>
+              <a:t>9/15</a:t>
+            </a:r>
+          </a:p>
+        </p:txBody>
+      </p:sp>
+      <p:pic>
+        <p:nvPicPr>
+          <p:cNvPr id="8" name="Picture 7">
+            <a:extLst>
+              <a:ext uri="{FF2B5EF4-FFF2-40B4-BE49-F238E27FC236}">
+                <a16:creationId xmlns:a16="http://schemas.microsoft.com/office/drawing/2014/main" id="{F8A508A1-35B0-6569-5444-18E41E360920}"/>
+              </a:ext>
+            </a:extLst>
+          </p:cNvPr>
+          <p:cNvPicPr>
+            <a:picLocks noChangeAspect="1"/>
+          </p:cNvPicPr>
+          <p:nvPr/>
+        </p:nvPicPr>
+        <p:blipFill>
+          <a:blip r:embed="rId3"/>
+          <a:stretch>
+            <a:fillRect/>
+          </a:stretch>
+        </p:blipFill>
+        <p:spPr>
+          <a:xfrm>
+            <a:off x="3857914" y="1914430"/>
+            <a:ext cx="5286086" cy="4306873"/>
+          </a:xfrm>
+          <a:prstGeom prst="rect">
+            <a:avLst/>
+          </a:prstGeom>
+        </p:spPr>
+      </p:pic>
+      <p:sp>
+        <p:nvSpPr>
+          <p:cNvPr id="9" name="Text Placeholder 2">
+            <a:extLst>
+              <a:ext uri="{FF2B5EF4-FFF2-40B4-BE49-F238E27FC236}">
+                <a16:creationId xmlns:a16="http://schemas.microsoft.com/office/drawing/2014/main" id="{4210A84A-AFD5-9F6D-B77B-7F240A795293}"/>
               </a:ext>
             </a:extLst>
           </p:cNvPr>
@@ -15285,16 +17850,43 @@
             <p:ph type="body" sz="quarter" idx="10"/>
           </p:nvPr>
         </p:nvSpPr>
-        <p:spPr/>
-        <p:txBody>
-          <a:bodyPr>
-            <a:normAutofit/>
-          </a:bodyPr>
+        <p:spPr>
+          <a:xfrm>
+            <a:off x="342900" y="1543324"/>
+            <a:ext cx="8450035" cy="4454706"/>
+          </a:xfrm>
+        </p:spPr>
+        <p:txBody>
+          <a:bodyPr/>
           <a:lstStyle/>
           <a:p>
-            <a:r>
-              <a:rPr lang="en-US" dirty="0"/>
-              <a:t>Purdue Polytechnic Institute</a:t>
+            <a:pPr marL="285750" indent="-285750">
+              <a:buFont typeface="Arial" panose="020B0604020202020204" pitchFamily="34" charset="0"/>
+              <a:buChar char="•"/>
+            </a:pPr>
+            <a:r>
+              <a:rPr lang="en-US" dirty="0"/>
+              <a:t>A0 analog input to read data in case of debugging</a:t>
+            </a:r>
+          </a:p>
+          <a:p>
+            <a:pPr marL="285750" indent="-285750">
+              <a:buFont typeface="Arial" panose="020B0604020202020204" pitchFamily="34" charset="0"/>
+              <a:buChar char="•"/>
+            </a:pPr>
+            <a:r>
+              <a:rPr lang="en-US" dirty="0"/>
+              <a:t>VIN connected to battery charger</a:t>
+            </a:r>
+          </a:p>
+          <a:p>
+            <a:pPr marL="628650" lvl="1" indent="-285750">
+              <a:buFont typeface="Arial" panose="020B0604020202020204" pitchFamily="34" charset="0"/>
+              <a:buChar char="•"/>
+            </a:pPr>
+            <a:r>
+              <a:rPr lang="en-US" dirty="0"/>
+              <a:t>3.3 V level</a:t>
             </a:r>
           </a:p>
         </p:txBody>
@@ -15302,7 +17894,7 @@
     </p:spTree>
     <p:extLst>
       <p:ext uri="{BB962C8B-B14F-4D97-AF65-F5344CB8AC3E}">
-        <p14:creationId xmlns:p14="http://schemas.microsoft.com/office/powerpoint/2010/main" val="3555266232"/>
+        <p14:creationId xmlns:p14="http://schemas.microsoft.com/office/powerpoint/2010/main" val="3648959107"/>
       </p:ext>
     </p:extLst>
   </p:cSld>
@@ -15895,6 +18487,15 @@
 </file>
 
 <file path=customXml/item1.xml><?xml version="1.0" encoding="utf-8"?>
+<?mso-contentType ?>
+<FormTemplates xmlns="http://schemas.microsoft.com/sharepoint/v3/contenttype/forms">
+  <Display>DocumentLibraryForm</Display>
+  <Edit>DocumentLibraryForm</Edit>
+  <New>DocumentLibraryForm</New>
+</FormTemplates>
+</file>
+
+<file path=customXml/item2.xml><?xml version="1.0" encoding="utf-8"?>
 <p:properties xmlns:p="http://schemas.microsoft.com/office/2006/metadata/properties" xmlns:xsi="http://www.w3.org/2001/XMLSchema-instance" xmlns:pc="http://schemas.microsoft.com/office/infopath/2007/PartnerControls">
   <documentManagement>
     <SharedWithUsers xmlns="d6656b4d-3fa0-4709-acfb-d5e813445d1e">
@@ -15935,15 +18536,6 @@
     <TaxCatchAll xmlns="d6656b4d-3fa0-4709-acfb-d5e813445d1e" xsi:nil="true"/>
   </documentManagement>
 </p:properties>
-</file>
-
-<file path=customXml/item2.xml><?xml version="1.0" encoding="utf-8"?>
-<?mso-contentType ?>
-<FormTemplates xmlns="http://schemas.microsoft.com/sharepoint/v3/contenttype/forms">
-  <Display>DocumentLibraryForm</Display>
-  <Edit>DocumentLibraryForm</Edit>
-  <New>DocumentLibraryForm</New>
-</FormTemplates>
 </file>
 
 <file path=customXml/item3.xml><?xml version="1.0" encoding="utf-8"?>
@@ -16170,6 +18762,14 @@
 </file>
 
 <file path=customXml/itemProps1.xml><?xml version="1.0" encoding="utf-8"?>
+<ds:datastoreItem xmlns:ds="http://schemas.openxmlformats.org/officeDocument/2006/customXml" ds:itemID="{F5B64EEB-1B4A-4920-AA44-E234D7D487D1}">
+  <ds:schemaRefs>
+    <ds:schemaRef ds:uri="http://schemas.microsoft.com/sharepoint/v3/contenttype/forms"/>
+  </ds:schemaRefs>
+</ds:datastoreItem>
+</file>
+
+<file path=customXml/itemProps2.xml><?xml version="1.0" encoding="utf-8"?>
 <ds:datastoreItem xmlns:ds="http://schemas.openxmlformats.org/officeDocument/2006/customXml" ds:itemID="{21DE0D6C-581B-4814-98E7-EF172D5D46A1}">
   <ds:schemaRefs>
     <ds:schemaRef ds:uri="http://purl.org/dc/elements/1.1/"/>
@@ -16182,14 +18782,6 @@
     <ds:schemaRef ds:uri="http://schemas.microsoft.com/office/2006/metadata/properties"/>
     <ds:schemaRef ds:uri="http://www.w3.org/XML/1998/namespace"/>
     <ds:schemaRef ds:uri="http://purl.org/dc/dcmitype/"/>
-  </ds:schemaRefs>
-</ds:datastoreItem>
-</file>
-
-<file path=customXml/itemProps2.xml><?xml version="1.0" encoding="utf-8"?>
-<ds:datastoreItem xmlns:ds="http://schemas.openxmlformats.org/officeDocument/2006/customXml" ds:itemID="{F5B64EEB-1B4A-4920-AA44-E234D7D487D1}">
-  <ds:schemaRefs>
-    <ds:schemaRef ds:uri="http://schemas.microsoft.com/sharepoint/v3/contenttype/forms"/>
   </ds:schemaRefs>
 </ds:datastoreItem>
 </file>
